--- a/docs/memoria-demo.pptx
+++ b/docs/memoria-demo.pptx
@@ -4,20 +4,23 @@
   <p:sldMasterIdLst>
     <p:sldMasterId id="2147483648" r:id="rId1"/>
   </p:sldMasterIdLst>
+  <p:notesMasterIdLst>
+    <p:notesMasterId r:id="rId13"/>
+  </p:notesMasterIdLst>
   <p:sldIdLst>
-    <p:sldId id="256" r:id="rId7"/>
-    <p:sldId id="257" r:id="rId9"/>
-    <p:sldId id="258" r:id="rId10"/>
-    <p:sldId id="259" r:id="rId11"/>
-    <p:sldId id="260" r:id="rId12"/>
-    <p:sldId id="261" r:id="rId13"/>
-    <p:sldId id="262" r:id="rId14"/>
-    <p:sldId id="263" r:id="rId15"/>
-    <p:sldId id="264" r:id="rId16"/>
-    <p:sldId id="265" r:id="rId17"/>
-    <p:sldId id="266" r:id="rId18"/>
+    <p:sldId id="256" r:id="rId2"/>
+    <p:sldId id="257" r:id="rId3"/>
+    <p:sldId id="258" r:id="rId4"/>
+    <p:sldId id="259" r:id="rId5"/>
+    <p:sldId id="260" r:id="rId6"/>
+    <p:sldId id="261" r:id="rId7"/>
+    <p:sldId id="262" r:id="rId8"/>
+    <p:sldId id="263" r:id="rId9"/>
+    <p:sldId id="264" r:id="rId10"/>
+    <p:sldId id="265" r:id="rId11"/>
+    <p:sldId id="266" r:id="rId12"/>
   </p:sldIdLst>
-  <p:sldSz cx="12191695" cy="6858000" type="screen4x3"/>
+  <p:sldSz cx="12192000" cy="6858000"/>
   <p:notesSz cx="6858000" cy="9144000"/>
   <p:defaultTextStyle>
     <a:defPPr>
@@ -114,11 +117,27 @@
       </a:defRPr>
     </a:lvl9pPr>
   </p:defaultTextStyle>
+  <p:extLst>
+    <p:ext uri="{EFAFB233-063F-42B5-8137-9DF3F51BA10A}">
+      <p15:sldGuideLst xmlns:p15="http://schemas.microsoft.com/office/powerpoint/2012/main">
+        <p15:guide id="1" orient="horz" pos="2160">
+          <p15:clr>
+            <a:srgbClr val="A4A3A4"/>
+          </p15:clr>
+        </p15:guide>
+        <p15:guide id="2" pos="2880">
+          <p15:clr>
+            <a:srgbClr val="A4A3A4"/>
+          </p15:clr>
+        </p15:guide>
+      </p15:sldGuideLst>
+    </p:ext>
+  </p:extLst>
 </p:presentation>
 </file>
 
 <file path=ppt/notesMasters/notesMaster1.xml><?xml version="1.0" encoding="utf-8"?>
-<p:notesMaster xmlns:a="http://schemas.openxmlformats.org/drawingml/2006/main" xmlns:p="http://schemas.openxmlformats.org/presentationml/2006/main" xmlns:r="http://schemas.openxmlformats.org/officeDocument/2006/relationships">
+<p:notesMaster xmlns:a="http://schemas.openxmlformats.org/drawingml/2006/main" xmlns:r="http://schemas.openxmlformats.org/officeDocument/2006/relationships" xmlns:p="http://schemas.openxmlformats.org/presentationml/2006/main">
   <p:cSld>
     <p:bg>
       <p:bgRef idx="1001">
@@ -139,241 +158,16 @@
           <a:chExt cx="0" cy="0"/>
         </a:xfrm>
       </p:grpSpPr>
-      <p:sp>
-        <p:nvSpPr>
-          <p:cNvPr id="2" name="Header Placeholder 1"/>
-          <p:cNvSpPr>
-            <a:spLocks noGrp="1"/>
-          </p:cNvSpPr>
-          <p:nvPr>
-            <p:ph type="hdr" sz="quarter"/>
-          </p:nvPr>
-        </p:nvSpPr>
-        <p:spPr>
-          <a:xfrm>
-            <a:off x="0" y="0"/>
-            <a:ext cx="2971800" cy="457200"/>
-          </a:xfrm>
-          <a:prstGeom prst="rect">
-            <a:avLst/>
-          </a:prstGeom>
-        </p:spPr>
-        <p:txBody>
-          <a:bodyPr vert="horz" lIns="91440" tIns="45720" rIns="91440" bIns="45720" rtlCol="0"/>
-          <a:lstStyle>
-            <a:lvl1pPr algn="l">
-              <a:defRPr sz="1200"/>
-            </a:lvl1pPr>
-          </a:lstStyle>
-          <a:p>
-            <a:endParaRPr lang="en-US"/>
-          </a:p>
-        </p:txBody>
-      </p:sp>
-      <p:sp>
-        <p:nvSpPr>
-          <p:cNvPr id="3" name="Date Placeholder 2"/>
-          <p:cNvSpPr>
-            <a:spLocks noGrp="1"/>
-          </p:cNvSpPr>
-          <p:nvPr>
-            <p:ph type="dt" idx="1"/>
-          </p:nvPr>
-        </p:nvSpPr>
-        <p:spPr>
-          <a:xfrm>
-            <a:off x="3884613" y="0"/>
-            <a:ext cx="2971800" cy="457200"/>
-          </a:xfrm>
-          <a:prstGeom prst="rect">
-            <a:avLst/>
-          </a:prstGeom>
-        </p:spPr>
-        <p:txBody>
-          <a:bodyPr vert="horz" lIns="91440" tIns="45720" rIns="91440" bIns="45720" rtlCol="0"/>
-          <a:lstStyle>
-            <a:lvl1pPr algn="r">
-              <a:defRPr sz="1200"/>
-            </a:lvl1pPr>
-          </a:lstStyle>
-          <a:p>
-            <a:fld id="{0F89C1C7-3DCD-1040-A9CF-14679D8B5DDD}" type="datetimeFigureOut">
-              <a:rPr lang="en-US" smtClean="0"/>
-              <a:t>10/17/16</a:t>
-            </a:fld>
-            <a:endParaRPr lang="en-US"/>
-          </a:p>
-        </p:txBody>
-      </p:sp>
-      <p:sp>
-        <p:nvSpPr>
-          <p:cNvPr id="4" name="Slide Image Placeholder 3"/>
-          <p:cNvSpPr>
-            <a:spLocks noGrp="1" noRot="1" noChangeAspect="1"/>
-          </p:cNvSpPr>
-          <p:nvPr>
-            <p:ph type="sldImg" idx="2"/>
-          </p:nvPr>
-        </p:nvSpPr>
-        <p:spPr>
-          <a:xfrm>
-            <a:off x="1143000" y="685800"/>
-            <a:ext cx="4572000" cy="3429000"/>
-          </a:xfrm>
-          <a:prstGeom prst="rect">
-            <a:avLst/>
-          </a:prstGeom>
-          <a:noFill/>
-          <a:ln w="12700">
-            <a:solidFill>
-              <a:prstClr val="black"/>
-            </a:solidFill>
-          </a:ln>
-        </p:spPr>
-        <p:txBody>
-          <a:bodyPr vert="horz" lIns="91440" tIns="45720" rIns="91440" bIns="45720" rtlCol="0" anchor="ctr"/>
-          <a:lstStyle/>
-          <a:p>
-            <a:endParaRPr lang="en-US"/>
-          </a:p>
-        </p:txBody>
-      </p:sp>
-      <p:sp>
-        <p:nvSpPr>
-          <p:cNvPr id="5" name="Notes Placeholder 4"/>
-          <p:cNvSpPr>
-            <a:spLocks noGrp="1"/>
-          </p:cNvSpPr>
-          <p:nvPr>
-            <p:ph type="body" sz="quarter" idx="3"/>
-          </p:nvPr>
-        </p:nvSpPr>
-        <p:spPr>
-          <a:xfrm>
-            <a:off x="685800" y="4343400"/>
-            <a:ext cx="5486400" cy="4114800"/>
-          </a:xfrm>
-          <a:prstGeom prst="rect">
-            <a:avLst/>
-          </a:prstGeom>
-        </p:spPr>
-        <p:txBody>
-          <a:bodyPr vert="horz" lIns="91440" tIns="45720" rIns="91440" bIns="45720" rtlCol="0"/>
-          <a:lstStyle/>
-          <a:p>
-            <a:pPr lvl="0"/>
-            <a:r>
-              <a:rPr lang="en-US" smtClean="0"/>
-              <a:t>Click to edit Master text styles</a:t>
-            </a:r>
-          </a:p>
-          <a:p>
-            <a:pPr lvl="1"/>
-            <a:r>
-              <a:rPr lang="en-US" smtClean="0"/>
-              <a:t>Second level</a:t>
-            </a:r>
-          </a:p>
-          <a:p>
-            <a:pPr lvl="2"/>
-            <a:r>
-              <a:rPr lang="en-US" smtClean="0"/>
-              <a:t>Third level</a:t>
-            </a:r>
-          </a:p>
-          <a:p>
-            <a:pPr lvl="3"/>
-            <a:r>
-              <a:rPr lang="en-US" smtClean="0"/>
-              <a:t>Fourth level</a:t>
-            </a:r>
-          </a:p>
-          <a:p>
-            <a:pPr lvl="4"/>
-            <a:r>
-              <a:rPr lang="en-US" smtClean="0"/>
-              <a:t>Fifth level</a:t>
-            </a:r>
-            <a:endParaRPr lang="en-US"/>
-          </a:p>
-        </p:txBody>
-      </p:sp>
-      <p:sp>
-        <p:nvSpPr>
-          <p:cNvPr id="6" name="Footer Placeholder 5"/>
-          <p:cNvSpPr>
-            <a:spLocks noGrp="1"/>
-          </p:cNvSpPr>
-          <p:nvPr>
-            <p:ph type="ftr" sz="quarter" idx="4"/>
-          </p:nvPr>
-        </p:nvSpPr>
-        <p:spPr>
-          <a:xfrm>
-            <a:off x="0" y="8685213"/>
-            <a:ext cx="2971800" cy="457200"/>
-          </a:xfrm>
-          <a:prstGeom prst="rect">
-            <a:avLst/>
-          </a:prstGeom>
-        </p:spPr>
-        <p:txBody>
-          <a:bodyPr vert="horz" lIns="91440" tIns="45720" rIns="91440" bIns="45720" rtlCol="0" anchor="b"/>
-          <a:lstStyle>
-            <a:lvl1pPr algn="l">
-              <a:defRPr sz="1200"/>
-            </a:lvl1pPr>
-          </a:lstStyle>
-          <a:p>
-            <a:endParaRPr lang="en-US"/>
-          </a:p>
-        </p:txBody>
-      </p:sp>
-      <p:sp>
-        <p:nvSpPr>
-          <p:cNvPr id="7" name="Slide Number Placeholder 6"/>
-          <p:cNvSpPr>
-            <a:spLocks noGrp="1"/>
-          </p:cNvSpPr>
-          <p:nvPr>
-            <p:ph type="sldNum" sz="quarter" idx="5"/>
-          </p:nvPr>
-        </p:nvSpPr>
-        <p:spPr>
-          <a:xfrm>
-            <a:off x="3884613" y="8685213"/>
-            <a:ext cx="2971800" cy="457200"/>
-          </a:xfrm>
-          <a:prstGeom prst="rect">
-            <a:avLst/>
-          </a:prstGeom>
-        </p:spPr>
-        <p:txBody>
-          <a:bodyPr vert="horz" lIns="91440" tIns="45720" rIns="91440" bIns="45720" rtlCol="0" anchor="b"/>
-          <a:lstStyle>
-            <a:lvl1pPr algn="r">
-              <a:defRPr sz="1200"/>
-            </a:lvl1pPr>
-          </a:lstStyle>
-          <a:p>
-            <a:fld id="{BB5E49A5-4136-284D-997B-48E1D791AD67}" type="slidenum">
-              <a:rPr lang="en-US" smtClean="0"/>
-              <a:t>‹#›</a:t>
-            </a:fld>
-            <a:endParaRPr lang="en-US"/>
-          </a:p>
-        </p:txBody>
-      </p:sp>
     </p:spTree>
     <p:extLst>
       <p:ext uri="{BB962C8B-B14F-4D97-AF65-F5344CB8AC3E}">
-        <p14:creationId xmlns:p14="http://schemas.microsoft.com/office/powerpoint/2010/main" val="2623252185"/>
+        <p14:creationId xmlns:p14="http://schemas.microsoft.com/office/powerpoint/2010/main" val="4187551063"/>
       </p:ext>
     </p:extLst>
   </p:cSld>
   <p:clrMap bg1="lt1" tx1="dk1" bg2="lt2" tx2="dk2" accent1="accent1" accent2="accent2" accent3="accent3" accent4="accent4" accent5="accent5" accent6="accent6" hlink="hlink" folHlink="folHlink"/>
   <p:notesStyle>
-    <a:lvl1pPr marL="0" algn="l" defTabSz="457200" rtl="0" eaLnBrk="1" latinLnBrk="0" hangingPunct="1">
+    <a:lvl1pPr marL="0" algn="l" defTabSz="914400" rtl="0" eaLnBrk="1" latinLnBrk="0" hangingPunct="1">
       <a:defRPr sz="1200" kern="1200">
         <a:solidFill>
           <a:schemeClr val="tx1"/>
@@ -383,7 +177,7 @@
         <a:cs typeface="+mn-cs"/>
       </a:defRPr>
     </a:lvl1pPr>
-    <a:lvl2pPr marL="457200" algn="l" defTabSz="457200" rtl="0" eaLnBrk="1" latinLnBrk="0" hangingPunct="1">
+    <a:lvl2pPr marL="457200" algn="l" defTabSz="914400" rtl="0" eaLnBrk="1" latinLnBrk="0" hangingPunct="1">
       <a:defRPr sz="1200" kern="1200">
         <a:solidFill>
           <a:schemeClr val="tx1"/>
@@ -393,7 +187,7 @@
         <a:cs typeface="+mn-cs"/>
       </a:defRPr>
     </a:lvl2pPr>
-    <a:lvl3pPr marL="914400" algn="l" defTabSz="457200" rtl="0" eaLnBrk="1" latinLnBrk="0" hangingPunct="1">
+    <a:lvl3pPr marL="914400" algn="l" defTabSz="914400" rtl="0" eaLnBrk="1" latinLnBrk="0" hangingPunct="1">
       <a:defRPr sz="1200" kern="1200">
         <a:solidFill>
           <a:schemeClr val="tx1"/>
@@ -403,7 +197,7 @@
         <a:cs typeface="+mn-cs"/>
       </a:defRPr>
     </a:lvl3pPr>
-    <a:lvl4pPr marL="1371600" algn="l" defTabSz="457200" rtl="0" eaLnBrk="1" latinLnBrk="0" hangingPunct="1">
+    <a:lvl4pPr marL="1371600" algn="l" defTabSz="914400" rtl="0" eaLnBrk="1" latinLnBrk="0" hangingPunct="1">
       <a:defRPr sz="1200" kern="1200">
         <a:solidFill>
           <a:schemeClr val="tx1"/>
@@ -413,7 +207,7 @@
         <a:cs typeface="+mn-cs"/>
       </a:defRPr>
     </a:lvl4pPr>
-    <a:lvl5pPr marL="1828800" algn="l" defTabSz="457200" rtl="0" eaLnBrk="1" latinLnBrk="0" hangingPunct="1">
+    <a:lvl5pPr marL="1828800" algn="l" defTabSz="914400" rtl="0" eaLnBrk="1" latinLnBrk="0" hangingPunct="1">
       <a:defRPr sz="1200" kern="1200">
         <a:solidFill>
           <a:schemeClr val="tx1"/>
@@ -423,7 +217,7 @@
         <a:cs typeface="+mn-cs"/>
       </a:defRPr>
     </a:lvl5pPr>
-    <a:lvl6pPr marL="2286000" algn="l" defTabSz="457200" rtl="0" eaLnBrk="1" latinLnBrk="0" hangingPunct="1">
+    <a:lvl6pPr marL="2286000" algn="l" defTabSz="914400" rtl="0" eaLnBrk="1" latinLnBrk="0" hangingPunct="1">
       <a:defRPr sz="1200" kern="1200">
         <a:solidFill>
           <a:schemeClr val="tx1"/>
@@ -433,7 +227,7 @@
         <a:cs typeface="+mn-cs"/>
       </a:defRPr>
     </a:lvl6pPr>
-    <a:lvl7pPr marL="2743200" algn="l" defTabSz="457200" rtl="0" eaLnBrk="1" latinLnBrk="0" hangingPunct="1">
+    <a:lvl7pPr marL="2743200" algn="l" defTabSz="914400" rtl="0" eaLnBrk="1" latinLnBrk="0" hangingPunct="1">
       <a:defRPr sz="1200" kern="1200">
         <a:solidFill>
           <a:schemeClr val="tx1"/>
@@ -443,7 +237,7 @@
         <a:cs typeface="+mn-cs"/>
       </a:defRPr>
     </a:lvl7pPr>
-    <a:lvl8pPr marL="3200400" algn="l" defTabSz="457200" rtl="0" eaLnBrk="1" latinLnBrk="0" hangingPunct="1">
+    <a:lvl8pPr marL="3200400" algn="l" defTabSz="914400" rtl="0" eaLnBrk="1" latinLnBrk="0" hangingPunct="1">
       <a:defRPr sz="1200" kern="1200">
         <a:solidFill>
           <a:schemeClr val="tx1"/>
@@ -453,7 +247,7 @@
         <a:cs typeface="+mn-cs"/>
       </a:defRPr>
     </a:lvl8pPr>
-    <a:lvl9pPr marL="3657600" algn="l" defTabSz="457200" rtl="0" eaLnBrk="1" latinLnBrk="0" hangingPunct="1">
+    <a:lvl9pPr marL="3657600" algn="l" defTabSz="914400" rtl="0" eaLnBrk="1" latinLnBrk="0" hangingPunct="1">
       <a:defRPr sz="1200" kern="1200">
         <a:solidFill>
           <a:schemeClr val="tx1"/>
@@ -468,7 +262,7 @@
 </file>
 
 <file path=ppt/notesSlides/notesSlide1.xml><?xml version="1.0" encoding="utf-8"?>
-<p:notes xmlns:a="http://schemas.openxmlformats.org/drawingml/2006/main" xmlns:p="http://schemas.openxmlformats.org/presentationml/2006/main" xmlns:r="http://schemas.openxmlformats.org/officeDocument/2006/relationships">
+<p:notes xmlns:a="http://schemas.openxmlformats.org/drawingml/2006/main" xmlns:r="http://schemas.openxmlformats.org/officeDocument/2006/relationships" xmlns:p="http://schemas.openxmlformats.org/presentationml/2006/main">
   <p:cSld>
     <p:spTree>
       <p:nvGrpSpPr>
@@ -488,7 +282,7 @@
         <p:nvSpPr>
           <p:cNvPr id="2" name="Slide Image Placeholder 1"/>
           <p:cNvSpPr>
-            <a:spLocks noGrp="1"/>
+            <a:spLocks noGrp="1" noRot="1" noChangeAspect="1"/>
           </p:cNvSpPr>
           <p:nvPr>
             <p:ph type="sldImg" idx="2"/>
@@ -503,7 +297,7 @@
             <a:spLocks noGrp="1"/>
           </p:cNvSpPr>
           <p:nvPr>
-            <p:ph type="body" idx="3" sz="quarter"/>
+            <p:ph type="body" sz="quarter" idx="3"/>
           </p:nvPr>
         </p:nvSpPr>
         <p:spPr/>
@@ -524,7 +318,7 @@
             <a:spLocks noGrp="1"/>
           </p:cNvSpPr>
           <p:nvPr>
-            <p:ph type="sldNum" idx="5" sz="quarter"/>
+            <p:ph type="sldNum" sz="quarter" idx="5"/>
           </p:nvPr>
         </p:nvSpPr>
         <p:spPr/>
@@ -538,7 +332,7 @@
 </file>
 
 <file path=ppt/notesSlides/notesSlide10.xml><?xml version="1.0" encoding="utf-8"?>
-<p:notes xmlns:a="http://schemas.openxmlformats.org/drawingml/2006/main" xmlns:p="http://schemas.openxmlformats.org/presentationml/2006/main" xmlns:r="http://schemas.openxmlformats.org/officeDocument/2006/relationships">
+<p:notes xmlns:a="http://schemas.openxmlformats.org/drawingml/2006/main" xmlns:r="http://schemas.openxmlformats.org/officeDocument/2006/relationships" xmlns:p="http://schemas.openxmlformats.org/presentationml/2006/main">
   <p:cSld>
     <p:spTree>
       <p:nvGrpSpPr>
@@ -558,7 +352,7 @@
         <p:nvSpPr>
           <p:cNvPr id="2" name="Slide Image Placeholder 1"/>
           <p:cNvSpPr>
-            <a:spLocks noGrp="1"/>
+            <a:spLocks noGrp="1" noRot="1" noChangeAspect="1"/>
           </p:cNvSpPr>
           <p:nvPr>
             <p:ph type="sldImg" idx="2"/>
@@ -573,7 +367,7 @@
             <a:spLocks noGrp="1"/>
           </p:cNvSpPr>
           <p:nvPr>
-            <p:ph type="body" idx="3" sz="quarter"/>
+            <p:ph type="body" sz="quarter" idx="3"/>
           </p:nvPr>
         </p:nvSpPr>
         <p:spPr/>
@@ -594,7 +388,7 @@
             <a:spLocks noGrp="1"/>
           </p:cNvSpPr>
           <p:nvPr>
-            <p:ph type="sldNum" idx="5" sz="quarter"/>
+            <p:ph type="sldNum" sz="quarter" idx="5"/>
           </p:nvPr>
         </p:nvSpPr>
         <p:spPr/>
@@ -608,7 +402,7 @@
 </file>
 
 <file path=ppt/notesSlides/notesSlide11.xml><?xml version="1.0" encoding="utf-8"?>
-<p:notes xmlns:a="http://schemas.openxmlformats.org/drawingml/2006/main" xmlns:p="http://schemas.openxmlformats.org/presentationml/2006/main" xmlns:r="http://schemas.openxmlformats.org/officeDocument/2006/relationships">
+<p:notes xmlns:a="http://schemas.openxmlformats.org/drawingml/2006/main" xmlns:r="http://schemas.openxmlformats.org/officeDocument/2006/relationships" xmlns:p="http://schemas.openxmlformats.org/presentationml/2006/main">
   <p:cSld>
     <p:spTree>
       <p:nvGrpSpPr>
@@ -628,7 +422,7 @@
         <p:nvSpPr>
           <p:cNvPr id="2" name="Slide Image Placeholder 1"/>
           <p:cNvSpPr>
-            <a:spLocks noGrp="1"/>
+            <a:spLocks noGrp="1" noRot="1" noChangeAspect="1"/>
           </p:cNvSpPr>
           <p:nvPr>
             <p:ph type="sldImg" idx="2"/>
@@ -643,7 +437,7 @@
             <a:spLocks noGrp="1"/>
           </p:cNvSpPr>
           <p:nvPr>
-            <p:ph type="body" idx="3" sz="quarter"/>
+            <p:ph type="body" sz="quarter" idx="3"/>
           </p:nvPr>
         </p:nvSpPr>
         <p:spPr/>
@@ -664,7 +458,7 @@
             <a:spLocks noGrp="1"/>
           </p:cNvSpPr>
           <p:nvPr>
-            <p:ph type="sldNum" idx="5" sz="quarter"/>
+            <p:ph type="sldNum" sz="quarter" idx="5"/>
           </p:nvPr>
         </p:nvSpPr>
         <p:spPr/>
@@ -678,7 +472,7 @@
 </file>
 
 <file path=ppt/notesSlides/notesSlide2.xml><?xml version="1.0" encoding="utf-8"?>
-<p:notes xmlns:a="http://schemas.openxmlformats.org/drawingml/2006/main" xmlns:p="http://schemas.openxmlformats.org/presentationml/2006/main" xmlns:r="http://schemas.openxmlformats.org/officeDocument/2006/relationships">
+<p:notes xmlns:a="http://schemas.openxmlformats.org/drawingml/2006/main" xmlns:r="http://schemas.openxmlformats.org/officeDocument/2006/relationships" xmlns:p="http://schemas.openxmlformats.org/presentationml/2006/main">
   <p:cSld>
     <p:spTree>
       <p:nvGrpSpPr>
@@ -698,7 +492,7 @@
         <p:nvSpPr>
           <p:cNvPr id="2" name="Slide Image Placeholder 1"/>
           <p:cNvSpPr>
-            <a:spLocks noGrp="1"/>
+            <a:spLocks noGrp="1" noRot="1" noChangeAspect="1"/>
           </p:cNvSpPr>
           <p:nvPr>
             <p:ph type="sldImg" idx="2"/>
@@ -713,7 +507,7 @@
             <a:spLocks noGrp="1"/>
           </p:cNvSpPr>
           <p:nvPr>
-            <p:ph type="body" idx="3" sz="quarter"/>
+            <p:ph type="body" sz="quarter" idx="3"/>
           </p:nvPr>
         </p:nvSpPr>
         <p:spPr/>
@@ -734,7 +528,7 @@
             <a:spLocks noGrp="1"/>
           </p:cNvSpPr>
           <p:nvPr>
-            <p:ph type="sldNum" idx="5" sz="quarter"/>
+            <p:ph type="sldNum" sz="quarter" idx="5"/>
           </p:nvPr>
         </p:nvSpPr>
         <p:spPr/>
@@ -748,7 +542,7 @@
 </file>
 
 <file path=ppt/notesSlides/notesSlide3.xml><?xml version="1.0" encoding="utf-8"?>
-<p:notes xmlns:a="http://schemas.openxmlformats.org/drawingml/2006/main" xmlns:p="http://schemas.openxmlformats.org/presentationml/2006/main" xmlns:r="http://schemas.openxmlformats.org/officeDocument/2006/relationships">
+<p:notes xmlns:a="http://schemas.openxmlformats.org/drawingml/2006/main" xmlns:r="http://schemas.openxmlformats.org/officeDocument/2006/relationships" xmlns:p="http://schemas.openxmlformats.org/presentationml/2006/main">
   <p:cSld>
     <p:spTree>
       <p:nvGrpSpPr>
@@ -768,7 +562,7 @@
         <p:nvSpPr>
           <p:cNvPr id="2" name="Slide Image Placeholder 1"/>
           <p:cNvSpPr>
-            <a:spLocks noGrp="1"/>
+            <a:spLocks noGrp="1" noRot="1" noChangeAspect="1"/>
           </p:cNvSpPr>
           <p:nvPr>
             <p:ph type="sldImg" idx="2"/>
@@ -783,7 +577,7 @@
             <a:spLocks noGrp="1"/>
           </p:cNvSpPr>
           <p:nvPr>
-            <p:ph type="body" idx="3" sz="quarter"/>
+            <p:ph type="body" sz="quarter" idx="3"/>
           </p:nvPr>
         </p:nvSpPr>
         <p:spPr/>
@@ -804,7 +598,7 @@
             <a:spLocks noGrp="1"/>
           </p:cNvSpPr>
           <p:nvPr>
-            <p:ph type="sldNum" idx="5" sz="quarter"/>
+            <p:ph type="sldNum" sz="quarter" idx="5"/>
           </p:nvPr>
         </p:nvSpPr>
         <p:spPr/>
@@ -818,7 +612,7 @@
 </file>
 
 <file path=ppt/notesSlides/notesSlide4.xml><?xml version="1.0" encoding="utf-8"?>
-<p:notes xmlns:a="http://schemas.openxmlformats.org/drawingml/2006/main" xmlns:p="http://schemas.openxmlformats.org/presentationml/2006/main" xmlns:r="http://schemas.openxmlformats.org/officeDocument/2006/relationships">
+<p:notes xmlns:a="http://schemas.openxmlformats.org/drawingml/2006/main" xmlns:r="http://schemas.openxmlformats.org/officeDocument/2006/relationships" xmlns:p="http://schemas.openxmlformats.org/presentationml/2006/main">
   <p:cSld>
     <p:spTree>
       <p:nvGrpSpPr>
@@ -838,7 +632,7 @@
         <p:nvSpPr>
           <p:cNvPr id="2" name="Slide Image Placeholder 1"/>
           <p:cNvSpPr>
-            <a:spLocks noGrp="1"/>
+            <a:spLocks noGrp="1" noRot="1" noChangeAspect="1"/>
           </p:cNvSpPr>
           <p:nvPr>
             <p:ph type="sldImg" idx="2"/>
@@ -853,7 +647,7 @@
             <a:spLocks noGrp="1"/>
           </p:cNvSpPr>
           <p:nvPr>
-            <p:ph type="body" idx="3" sz="quarter"/>
+            <p:ph type="body" sz="quarter" idx="3"/>
           </p:nvPr>
         </p:nvSpPr>
         <p:spPr/>
@@ -874,7 +668,7 @@
             <a:spLocks noGrp="1"/>
           </p:cNvSpPr>
           <p:nvPr>
-            <p:ph type="sldNum" idx="5" sz="quarter"/>
+            <p:ph type="sldNum" sz="quarter" idx="5"/>
           </p:nvPr>
         </p:nvSpPr>
         <p:spPr/>
@@ -888,7 +682,7 @@
 </file>
 
 <file path=ppt/notesSlides/notesSlide5.xml><?xml version="1.0" encoding="utf-8"?>
-<p:notes xmlns:a="http://schemas.openxmlformats.org/drawingml/2006/main" xmlns:p="http://schemas.openxmlformats.org/presentationml/2006/main" xmlns:r="http://schemas.openxmlformats.org/officeDocument/2006/relationships">
+<p:notes xmlns:a="http://schemas.openxmlformats.org/drawingml/2006/main" xmlns:r="http://schemas.openxmlformats.org/officeDocument/2006/relationships" xmlns:p="http://schemas.openxmlformats.org/presentationml/2006/main">
   <p:cSld>
     <p:spTree>
       <p:nvGrpSpPr>
@@ -908,7 +702,7 @@
         <p:nvSpPr>
           <p:cNvPr id="2" name="Slide Image Placeholder 1"/>
           <p:cNvSpPr>
-            <a:spLocks noGrp="1"/>
+            <a:spLocks noGrp="1" noRot="1" noChangeAspect="1"/>
           </p:cNvSpPr>
           <p:nvPr>
             <p:ph type="sldImg" idx="2"/>
@@ -923,7 +717,7 @@
             <a:spLocks noGrp="1"/>
           </p:cNvSpPr>
           <p:nvPr>
-            <p:ph type="body" idx="3" sz="quarter"/>
+            <p:ph type="body" sz="quarter" idx="3"/>
           </p:nvPr>
         </p:nvSpPr>
         <p:spPr/>
@@ -944,7 +738,7 @@
             <a:spLocks noGrp="1"/>
           </p:cNvSpPr>
           <p:nvPr>
-            <p:ph type="sldNum" idx="5" sz="quarter"/>
+            <p:ph type="sldNum" sz="quarter" idx="5"/>
           </p:nvPr>
         </p:nvSpPr>
         <p:spPr/>
@@ -958,7 +752,7 @@
 </file>
 
 <file path=ppt/notesSlides/notesSlide6.xml><?xml version="1.0" encoding="utf-8"?>
-<p:notes xmlns:a="http://schemas.openxmlformats.org/drawingml/2006/main" xmlns:p="http://schemas.openxmlformats.org/presentationml/2006/main" xmlns:r="http://schemas.openxmlformats.org/officeDocument/2006/relationships">
+<p:notes xmlns:a="http://schemas.openxmlformats.org/drawingml/2006/main" xmlns:r="http://schemas.openxmlformats.org/officeDocument/2006/relationships" xmlns:p="http://schemas.openxmlformats.org/presentationml/2006/main">
   <p:cSld>
     <p:spTree>
       <p:nvGrpSpPr>
@@ -978,7 +772,7 @@
         <p:nvSpPr>
           <p:cNvPr id="2" name="Slide Image Placeholder 1"/>
           <p:cNvSpPr>
-            <a:spLocks noGrp="1"/>
+            <a:spLocks noGrp="1" noRot="1" noChangeAspect="1"/>
           </p:cNvSpPr>
           <p:nvPr>
             <p:ph type="sldImg" idx="2"/>
@@ -993,7 +787,7 @@
             <a:spLocks noGrp="1"/>
           </p:cNvSpPr>
           <p:nvPr>
-            <p:ph type="body" idx="3" sz="quarter"/>
+            <p:ph type="body" sz="quarter" idx="3"/>
           </p:nvPr>
         </p:nvSpPr>
         <p:spPr/>
@@ -1014,7 +808,7 @@
             <a:spLocks noGrp="1"/>
           </p:cNvSpPr>
           <p:nvPr>
-            <p:ph type="sldNum" idx="5" sz="quarter"/>
+            <p:ph type="sldNum" sz="quarter" idx="5"/>
           </p:nvPr>
         </p:nvSpPr>
         <p:spPr/>
@@ -1028,7 +822,7 @@
 </file>
 
 <file path=ppt/notesSlides/notesSlide7.xml><?xml version="1.0" encoding="utf-8"?>
-<p:notes xmlns:a="http://schemas.openxmlformats.org/drawingml/2006/main" xmlns:p="http://schemas.openxmlformats.org/presentationml/2006/main" xmlns:r="http://schemas.openxmlformats.org/officeDocument/2006/relationships">
+<p:notes xmlns:a="http://schemas.openxmlformats.org/drawingml/2006/main" xmlns:r="http://schemas.openxmlformats.org/officeDocument/2006/relationships" xmlns:p="http://schemas.openxmlformats.org/presentationml/2006/main">
   <p:cSld>
     <p:spTree>
       <p:nvGrpSpPr>
@@ -1048,7 +842,7 @@
         <p:nvSpPr>
           <p:cNvPr id="2" name="Slide Image Placeholder 1"/>
           <p:cNvSpPr>
-            <a:spLocks noGrp="1"/>
+            <a:spLocks noGrp="1" noRot="1" noChangeAspect="1"/>
           </p:cNvSpPr>
           <p:nvPr>
             <p:ph type="sldImg" idx="2"/>
@@ -1063,7 +857,7 @@
             <a:spLocks noGrp="1"/>
           </p:cNvSpPr>
           <p:nvPr>
-            <p:ph type="body" idx="3" sz="quarter"/>
+            <p:ph type="body" sz="quarter" idx="3"/>
           </p:nvPr>
         </p:nvSpPr>
         <p:spPr/>
@@ -1084,7 +878,7 @@
             <a:spLocks noGrp="1"/>
           </p:cNvSpPr>
           <p:nvPr>
-            <p:ph type="sldNum" idx="5" sz="quarter"/>
+            <p:ph type="sldNum" sz="quarter" idx="5"/>
           </p:nvPr>
         </p:nvSpPr>
         <p:spPr/>
@@ -1098,7 +892,7 @@
 </file>
 
 <file path=ppt/notesSlides/notesSlide8.xml><?xml version="1.0" encoding="utf-8"?>
-<p:notes xmlns:a="http://schemas.openxmlformats.org/drawingml/2006/main" xmlns:p="http://schemas.openxmlformats.org/presentationml/2006/main" xmlns:r="http://schemas.openxmlformats.org/officeDocument/2006/relationships">
+<p:notes xmlns:a="http://schemas.openxmlformats.org/drawingml/2006/main" xmlns:r="http://schemas.openxmlformats.org/officeDocument/2006/relationships" xmlns:p="http://schemas.openxmlformats.org/presentationml/2006/main">
   <p:cSld>
     <p:spTree>
       <p:nvGrpSpPr>
@@ -1118,7 +912,7 @@
         <p:nvSpPr>
           <p:cNvPr id="2" name="Slide Image Placeholder 1"/>
           <p:cNvSpPr>
-            <a:spLocks noGrp="1"/>
+            <a:spLocks noGrp="1" noRot="1" noChangeAspect="1"/>
           </p:cNvSpPr>
           <p:nvPr>
             <p:ph type="sldImg" idx="2"/>
@@ -1133,7 +927,7 @@
             <a:spLocks noGrp="1"/>
           </p:cNvSpPr>
           <p:nvPr>
-            <p:ph type="body" idx="3" sz="quarter"/>
+            <p:ph type="body" sz="quarter" idx="3"/>
           </p:nvPr>
         </p:nvSpPr>
         <p:spPr/>
@@ -1154,7 +948,7 @@
             <a:spLocks noGrp="1"/>
           </p:cNvSpPr>
           <p:nvPr>
-            <p:ph type="sldNum" idx="5" sz="quarter"/>
+            <p:ph type="sldNum" sz="quarter" idx="5"/>
           </p:nvPr>
         </p:nvSpPr>
         <p:spPr/>
@@ -1168,7 +962,7 @@
 </file>
 
 <file path=ppt/notesSlides/notesSlide9.xml><?xml version="1.0" encoding="utf-8"?>
-<p:notes xmlns:a="http://schemas.openxmlformats.org/drawingml/2006/main" xmlns:p="http://schemas.openxmlformats.org/presentationml/2006/main" xmlns:r="http://schemas.openxmlformats.org/officeDocument/2006/relationships">
+<p:notes xmlns:a="http://schemas.openxmlformats.org/drawingml/2006/main" xmlns:r="http://schemas.openxmlformats.org/officeDocument/2006/relationships" xmlns:p="http://schemas.openxmlformats.org/presentationml/2006/main">
   <p:cSld>
     <p:spTree>
       <p:nvGrpSpPr>
@@ -1188,7 +982,7 @@
         <p:nvSpPr>
           <p:cNvPr id="2" name="Slide Image Placeholder 1"/>
           <p:cNvSpPr>
-            <a:spLocks noGrp="1"/>
+            <a:spLocks noGrp="1" noRot="1" noChangeAspect="1"/>
           </p:cNvSpPr>
           <p:nvPr>
             <p:ph type="sldImg" idx="2"/>
@@ -1203,7 +997,7 @@
             <a:spLocks noGrp="1"/>
           </p:cNvSpPr>
           <p:nvPr>
-            <p:ph type="body" idx="3" sz="quarter"/>
+            <p:ph type="body" sz="quarter" idx="3"/>
           </p:nvPr>
         </p:nvSpPr>
         <p:spPr/>
@@ -1224,7 +1018,7 @@
             <a:spLocks noGrp="1"/>
           </p:cNvSpPr>
           <p:nvPr>
-            <p:ph type="sldNum" idx="5" sz="quarter"/>
+            <p:ph type="sldNum" sz="quarter" idx="5"/>
           </p:nvPr>
         </p:nvSpPr>
         <p:spPr/>
@@ -1275,10 +1069,9 @@
           <a:lstStyle/>
           <a:p>
             <a:r>
-              <a:rPr lang="en-US" smtClean="0"/>
+              <a:rPr lang="en-US"/>
               <a:t>Click to edit Master title style</a:t>
             </a:r>
-            <a:endParaRPr lang="en-US"/>
           </a:p>
         </p:txBody>
       </p:sp>
@@ -1394,10 +1187,9 @@
           </a:lstStyle>
           <a:p>
             <a:r>
-              <a:rPr lang="en-US" smtClean="0"/>
+              <a:rPr lang="en-US"/>
               <a:t>Click to edit Master subtitle style</a:t>
             </a:r>
-            <a:endParaRPr lang="en-US"/>
           </a:p>
         </p:txBody>
       </p:sp>
@@ -1418,7 +1210,7 @@
           <a:p>
             <a:fld id="{5BCAD085-E8A6-8845-BD4E-CB4CCA059FC4}" type="datetimeFigureOut">
               <a:rPr lang="en-US" smtClean="0"/>
-              <a:t>1/27/13</a:t>
+              <a:t>10/23/26</a:t>
             </a:fld>
             <a:endParaRPr lang="en-US"/>
           </a:p>
@@ -1512,10 +1304,9 @@
           <a:lstStyle/>
           <a:p>
             <a:r>
-              <a:rPr lang="en-US" smtClean="0"/>
+              <a:rPr lang="en-US"/>
               <a:t>Click to edit Master title style</a:t>
             </a:r>
-            <a:endParaRPr lang="en-US"/>
           </a:p>
         </p:txBody>
       </p:sp>
@@ -1536,38 +1327,37 @@
           <a:p>
             <a:pPr lvl="0"/>
             <a:r>
-              <a:rPr lang="en-US" smtClean="0"/>
+              <a:rPr lang="en-US"/>
               <a:t>Click to edit Master text styles</a:t>
             </a:r>
           </a:p>
           <a:p>
             <a:pPr lvl="1"/>
             <a:r>
-              <a:rPr lang="en-US" smtClean="0"/>
+              <a:rPr lang="en-US"/>
               <a:t>Second level</a:t>
             </a:r>
           </a:p>
           <a:p>
             <a:pPr lvl="2"/>
             <a:r>
-              <a:rPr lang="en-US" smtClean="0"/>
+              <a:rPr lang="en-US"/>
               <a:t>Third level</a:t>
             </a:r>
           </a:p>
           <a:p>
             <a:pPr lvl="3"/>
             <a:r>
-              <a:rPr lang="en-US" smtClean="0"/>
+              <a:rPr lang="en-US"/>
               <a:t>Fourth level</a:t>
             </a:r>
           </a:p>
           <a:p>
             <a:pPr lvl="4"/>
             <a:r>
-              <a:rPr lang="en-US" smtClean="0"/>
+              <a:rPr lang="en-US"/>
               <a:t>Fifth level</a:t>
             </a:r>
-            <a:endParaRPr lang="en-US"/>
           </a:p>
         </p:txBody>
       </p:sp>
@@ -1588,7 +1378,7 @@
           <a:p>
             <a:fld id="{5BCAD085-E8A6-8845-BD4E-CB4CCA059FC4}" type="datetimeFigureOut">
               <a:rPr lang="en-US" smtClean="0"/>
-              <a:t>1/27/13</a:t>
+              <a:t>10/23/26</a:t>
             </a:fld>
             <a:endParaRPr lang="en-US"/>
           </a:p>
@@ -1687,10 +1477,9 @@
           <a:lstStyle/>
           <a:p>
             <a:r>
-              <a:rPr lang="en-US" smtClean="0"/>
+              <a:rPr lang="en-US"/>
               <a:t>Click to edit Master title style</a:t>
             </a:r>
-            <a:endParaRPr lang="en-US"/>
           </a:p>
         </p:txBody>
       </p:sp>
@@ -1716,38 +1505,37 @@
           <a:p>
             <a:pPr lvl="0"/>
             <a:r>
-              <a:rPr lang="en-US" smtClean="0"/>
+              <a:rPr lang="en-US"/>
               <a:t>Click to edit Master text styles</a:t>
             </a:r>
           </a:p>
           <a:p>
             <a:pPr lvl="1"/>
             <a:r>
-              <a:rPr lang="en-US" smtClean="0"/>
+              <a:rPr lang="en-US"/>
               <a:t>Second level</a:t>
             </a:r>
           </a:p>
           <a:p>
             <a:pPr lvl="2"/>
             <a:r>
-              <a:rPr lang="en-US" smtClean="0"/>
+              <a:rPr lang="en-US"/>
               <a:t>Third level</a:t>
             </a:r>
           </a:p>
           <a:p>
             <a:pPr lvl="3"/>
             <a:r>
-              <a:rPr lang="en-US" smtClean="0"/>
+              <a:rPr lang="en-US"/>
               <a:t>Fourth level</a:t>
             </a:r>
           </a:p>
           <a:p>
             <a:pPr lvl="4"/>
             <a:r>
-              <a:rPr lang="en-US" smtClean="0"/>
+              <a:rPr lang="en-US"/>
               <a:t>Fifth level</a:t>
             </a:r>
-            <a:endParaRPr lang="en-US"/>
           </a:p>
         </p:txBody>
       </p:sp>
@@ -1768,7 +1556,7 @@
           <a:p>
             <a:fld id="{5BCAD085-E8A6-8845-BD4E-CB4CCA059FC4}" type="datetimeFigureOut">
               <a:rPr lang="en-US" smtClean="0"/>
-              <a:t>1/27/13</a:t>
+              <a:t>10/23/26</a:t>
             </a:fld>
             <a:endParaRPr lang="en-US"/>
           </a:p>
@@ -1862,10 +1650,9 @@
           <a:lstStyle/>
           <a:p>
             <a:r>
-              <a:rPr lang="en-US" smtClean="0"/>
+              <a:rPr lang="en-US"/>
               <a:t>Click to edit Master title style</a:t>
             </a:r>
-            <a:endParaRPr lang="en-US"/>
           </a:p>
         </p:txBody>
       </p:sp>
@@ -1886,38 +1673,37 @@
           <a:p>
             <a:pPr lvl="0"/>
             <a:r>
-              <a:rPr lang="en-US" smtClean="0"/>
+              <a:rPr lang="en-US"/>
               <a:t>Click to edit Master text styles</a:t>
             </a:r>
           </a:p>
           <a:p>
             <a:pPr lvl="1"/>
             <a:r>
-              <a:rPr lang="en-US" smtClean="0"/>
+              <a:rPr lang="en-US"/>
               <a:t>Second level</a:t>
             </a:r>
           </a:p>
           <a:p>
             <a:pPr lvl="2"/>
             <a:r>
-              <a:rPr lang="en-US" smtClean="0"/>
+              <a:rPr lang="en-US"/>
               <a:t>Third level</a:t>
             </a:r>
           </a:p>
           <a:p>
             <a:pPr lvl="3"/>
             <a:r>
-              <a:rPr lang="en-US" smtClean="0"/>
+              <a:rPr lang="en-US"/>
               <a:t>Fourth level</a:t>
             </a:r>
           </a:p>
           <a:p>
             <a:pPr lvl="4"/>
             <a:r>
-              <a:rPr lang="en-US" smtClean="0"/>
+              <a:rPr lang="en-US"/>
               <a:t>Fifth level</a:t>
             </a:r>
-            <a:endParaRPr lang="en-US"/>
           </a:p>
         </p:txBody>
       </p:sp>
@@ -1938,7 +1724,7 @@
           <a:p>
             <a:fld id="{5BCAD085-E8A6-8845-BD4E-CB4CCA059FC4}" type="datetimeFigureOut">
               <a:rPr lang="en-US" smtClean="0"/>
-              <a:t>1/27/13</a:t>
+              <a:t>10/23/26</a:t>
             </a:fld>
             <a:endParaRPr lang="en-US"/>
           </a:p>
@@ -2041,10 +1827,9 @@
           </a:lstStyle>
           <a:p>
             <a:r>
-              <a:rPr lang="en-US" smtClean="0"/>
+              <a:rPr lang="en-US"/>
               <a:t>Click to edit Master title style</a:t>
             </a:r>
-            <a:endParaRPr lang="en-US"/>
           </a:p>
         </p:txBody>
       </p:sp>
@@ -2161,7 +1946,7 @@
           <a:p>
             <a:pPr lvl="0"/>
             <a:r>
-              <a:rPr lang="en-US" smtClean="0"/>
+              <a:rPr lang="en-US"/>
               <a:t>Click to edit Master text styles</a:t>
             </a:r>
           </a:p>
@@ -2184,7 +1969,7 @@
           <a:p>
             <a:fld id="{5BCAD085-E8A6-8845-BD4E-CB4CCA059FC4}" type="datetimeFigureOut">
               <a:rPr lang="en-US" smtClean="0"/>
-              <a:t>1/27/13</a:t>
+              <a:t>10/23/26</a:t>
             </a:fld>
             <a:endParaRPr lang="en-US"/>
           </a:p>
@@ -2278,10 +2063,9 @@
           <a:lstStyle/>
           <a:p>
             <a:r>
-              <a:rPr lang="en-US" smtClean="0"/>
+              <a:rPr lang="en-US"/>
               <a:t>Click to edit Master title style</a:t>
             </a:r>
-            <a:endParaRPr lang="en-US"/>
           </a:p>
         </p:txBody>
       </p:sp>
@@ -2335,38 +2119,37 @@
           <a:p>
             <a:pPr lvl="0"/>
             <a:r>
-              <a:rPr lang="en-US" smtClean="0"/>
+              <a:rPr lang="en-US"/>
               <a:t>Click to edit Master text styles</a:t>
             </a:r>
           </a:p>
           <a:p>
             <a:pPr lvl="1"/>
             <a:r>
-              <a:rPr lang="en-US" smtClean="0"/>
+              <a:rPr lang="en-US"/>
               <a:t>Second level</a:t>
             </a:r>
           </a:p>
           <a:p>
             <a:pPr lvl="2"/>
             <a:r>
-              <a:rPr lang="en-US" smtClean="0"/>
+              <a:rPr lang="en-US"/>
               <a:t>Third level</a:t>
             </a:r>
           </a:p>
           <a:p>
             <a:pPr lvl="3"/>
             <a:r>
-              <a:rPr lang="en-US" smtClean="0"/>
+              <a:rPr lang="en-US"/>
               <a:t>Fourth level</a:t>
             </a:r>
           </a:p>
           <a:p>
             <a:pPr lvl="4"/>
             <a:r>
-              <a:rPr lang="en-US" smtClean="0"/>
+              <a:rPr lang="en-US"/>
               <a:t>Fifth level</a:t>
             </a:r>
-            <a:endParaRPr lang="en-US"/>
           </a:p>
         </p:txBody>
       </p:sp>
@@ -2420,38 +2203,37 @@
           <a:p>
             <a:pPr lvl="0"/>
             <a:r>
-              <a:rPr lang="en-US" smtClean="0"/>
+              <a:rPr lang="en-US"/>
               <a:t>Click to edit Master text styles</a:t>
             </a:r>
           </a:p>
           <a:p>
             <a:pPr lvl="1"/>
             <a:r>
-              <a:rPr lang="en-US" smtClean="0"/>
+              <a:rPr lang="en-US"/>
               <a:t>Second level</a:t>
             </a:r>
           </a:p>
           <a:p>
             <a:pPr lvl="2"/>
             <a:r>
-              <a:rPr lang="en-US" smtClean="0"/>
+              <a:rPr lang="en-US"/>
               <a:t>Third level</a:t>
             </a:r>
           </a:p>
           <a:p>
             <a:pPr lvl="3"/>
             <a:r>
-              <a:rPr lang="en-US" smtClean="0"/>
+              <a:rPr lang="en-US"/>
               <a:t>Fourth level</a:t>
             </a:r>
           </a:p>
           <a:p>
             <a:pPr lvl="4"/>
             <a:r>
-              <a:rPr lang="en-US" smtClean="0"/>
+              <a:rPr lang="en-US"/>
               <a:t>Fifth level</a:t>
             </a:r>
-            <a:endParaRPr lang="en-US"/>
           </a:p>
         </p:txBody>
       </p:sp>
@@ -2472,7 +2254,7 @@
           <a:p>
             <a:fld id="{5BCAD085-E8A6-8845-BD4E-CB4CCA059FC4}" type="datetimeFigureOut">
               <a:rPr lang="en-US" smtClean="0"/>
-              <a:t>1/27/13</a:t>
+              <a:t>10/23/26</a:t>
             </a:fld>
             <a:endParaRPr lang="en-US"/>
           </a:p>
@@ -2570,10 +2352,9 @@
           </a:lstStyle>
           <a:p>
             <a:r>
-              <a:rPr lang="en-US" smtClean="0"/>
+              <a:rPr lang="en-US"/>
               <a:t>Click to edit Master title style</a:t>
             </a:r>
-            <a:endParaRPr lang="en-US"/>
           </a:p>
         </p:txBody>
       </p:sp>
@@ -2636,7 +2417,7 @@
           <a:p>
             <a:pPr lvl="0"/>
             <a:r>
-              <a:rPr lang="en-US" smtClean="0"/>
+              <a:rPr lang="en-US"/>
               <a:t>Click to edit Master text styles</a:t>
             </a:r>
           </a:p>
@@ -2692,38 +2473,37 @@
           <a:p>
             <a:pPr lvl="0"/>
             <a:r>
-              <a:rPr lang="en-US" smtClean="0"/>
+              <a:rPr lang="en-US"/>
               <a:t>Click to edit Master text styles</a:t>
             </a:r>
           </a:p>
           <a:p>
             <a:pPr lvl="1"/>
             <a:r>
-              <a:rPr lang="en-US" smtClean="0"/>
+              <a:rPr lang="en-US"/>
               <a:t>Second level</a:t>
             </a:r>
           </a:p>
           <a:p>
             <a:pPr lvl="2"/>
             <a:r>
-              <a:rPr lang="en-US" smtClean="0"/>
+              <a:rPr lang="en-US"/>
               <a:t>Third level</a:t>
             </a:r>
           </a:p>
           <a:p>
             <a:pPr lvl="3"/>
             <a:r>
-              <a:rPr lang="en-US" smtClean="0"/>
+              <a:rPr lang="en-US"/>
               <a:t>Fourth level</a:t>
             </a:r>
           </a:p>
           <a:p>
             <a:pPr lvl="4"/>
             <a:r>
-              <a:rPr lang="en-US" smtClean="0"/>
+              <a:rPr lang="en-US"/>
               <a:t>Fifth level</a:t>
             </a:r>
-            <a:endParaRPr lang="en-US"/>
           </a:p>
         </p:txBody>
       </p:sp>
@@ -2786,7 +2566,7 @@
           <a:p>
             <a:pPr lvl="0"/>
             <a:r>
-              <a:rPr lang="en-US" smtClean="0"/>
+              <a:rPr lang="en-US"/>
               <a:t>Click to edit Master text styles</a:t>
             </a:r>
           </a:p>
@@ -2842,38 +2622,37 @@
           <a:p>
             <a:pPr lvl="0"/>
             <a:r>
-              <a:rPr lang="en-US" smtClean="0"/>
+              <a:rPr lang="en-US"/>
               <a:t>Click to edit Master text styles</a:t>
             </a:r>
           </a:p>
           <a:p>
             <a:pPr lvl="1"/>
             <a:r>
-              <a:rPr lang="en-US" smtClean="0"/>
+              <a:rPr lang="en-US"/>
               <a:t>Second level</a:t>
             </a:r>
           </a:p>
           <a:p>
             <a:pPr lvl="2"/>
             <a:r>
-              <a:rPr lang="en-US" smtClean="0"/>
+              <a:rPr lang="en-US"/>
               <a:t>Third level</a:t>
             </a:r>
           </a:p>
           <a:p>
             <a:pPr lvl="3"/>
             <a:r>
-              <a:rPr lang="en-US" smtClean="0"/>
+              <a:rPr lang="en-US"/>
               <a:t>Fourth level</a:t>
             </a:r>
           </a:p>
           <a:p>
             <a:pPr lvl="4"/>
             <a:r>
-              <a:rPr lang="en-US" smtClean="0"/>
+              <a:rPr lang="en-US"/>
               <a:t>Fifth level</a:t>
             </a:r>
-            <a:endParaRPr lang="en-US"/>
           </a:p>
         </p:txBody>
       </p:sp>
@@ -2894,7 +2673,7 @@
           <a:p>
             <a:fld id="{5BCAD085-E8A6-8845-BD4E-CB4CCA059FC4}" type="datetimeFigureOut">
               <a:rPr lang="en-US" smtClean="0"/>
-              <a:t>1/27/13</a:t>
+              <a:t>10/23/26</a:t>
             </a:fld>
             <a:endParaRPr lang="en-US"/>
           </a:p>
@@ -2988,10 +2767,9 @@
           <a:lstStyle/>
           <a:p>
             <a:r>
-              <a:rPr lang="en-US" smtClean="0"/>
+              <a:rPr lang="en-US"/>
               <a:t>Click to edit Master title style</a:t>
             </a:r>
-            <a:endParaRPr lang="en-US"/>
           </a:p>
         </p:txBody>
       </p:sp>
@@ -3012,7 +2790,7 @@
           <a:p>
             <a:fld id="{5BCAD085-E8A6-8845-BD4E-CB4CCA059FC4}" type="datetimeFigureOut">
               <a:rPr lang="en-US" smtClean="0"/>
-              <a:t>1/27/13</a:t>
+              <a:t>10/23/26</a:t>
             </a:fld>
             <a:endParaRPr lang="en-US"/>
           </a:p>
@@ -3107,7 +2885,7 @@
           <a:p>
             <a:fld id="{5BCAD085-E8A6-8845-BD4E-CB4CCA059FC4}" type="datetimeFigureOut">
               <a:rPr lang="en-US" smtClean="0"/>
-              <a:t>1/27/13</a:t>
+              <a:t>10/23/26</a:t>
             </a:fld>
             <a:endParaRPr lang="en-US"/>
           </a:p>
@@ -3210,10 +2988,9 @@
           </a:lstStyle>
           <a:p>
             <a:r>
-              <a:rPr lang="en-US" smtClean="0"/>
+              <a:rPr lang="en-US"/>
               <a:t>Click to edit Master title style</a:t>
             </a:r>
-            <a:endParaRPr lang="en-US"/>
           </a:p>
         </p:txBody>
       </p:sp>
@@ -3267,38 +3044,37 @@
           <a:p>
             <a:pPr lvl="0"/>
             <a:r>
-              <a:rPr lang="en-US" smtClean="0"/>
+              <a:rPr lang="en-US"/>
               <a:t>Click to edit Master text styles</a:t>
             </a:r>
           </a:p>
           <a:p>
             <a:pPr lvl="1"/>
             <a:r>
-              <a:rPr lang="en-US" smtClean="0"/>
+              <a:rPr lang="en-US"/>
               <a:t>Second level</a:t>
             </a:r>
           </a:p>
           <a:p>
             <a:pPr lvl="2"/>
             <a:r>
-              <a:rPr lang="en-US" smtClean="0"/>
+              <a:rPr lang="en-US"/>
               <a:t>Third level</a:t>
             </a:r>
           </a:p>
           <a:p>
             <a:pPr lvl="3"/>
             <a:r>
-              <a:rPr lang="en-US" smtClean="0"/>
+              <a:rPr lang="en-US"/>
               <a:t>Fourth level</a:t>
             </a:r>
           </a:p>
           <a:p>
             <a:pPr lvl="4"/>
             <a:r>
-              <a:rPr lang="en-US" smtClean="0"/>
+              <a:rPr lang="en-US"/>
               <a:t>Fifth level</a:t>
             </a:r>
-            <a:endParaRPr lang="en-US"/>
           </a:p>
         </p:txBody>
       </p:sp>
@@ -3361,7 +3137,7 @@
           <a:p>
             <a:pPr lvl="0"/>
             <a:r>
-              <a:rPr lang="en-US" smtClean="0"/>
+              <a:rPr lang="en-US"/>
               <a:t>Click to edit Master text styles</a:t>
             </a:r>
           </a:p>
@@ -3384,7 +3160,7 @@
           <a:p>
             <a:fld id="{5BCAD085-E8A6-8845-BD4E-CB4CCA059FC4}" type="datetimeFigureOut">
               <a:rPr lang="en-US" smtClean="0"/>
-              <a:t>1/27/13</a:t>
+              <a:t>10/23/26</a:t>
             </a:fld>
             <a:endParaRPr lang="en-US"/>
           </a:p>
@@ -3487,10 +3263,9 @@
           </a:lstStyle>
           <a:p>
             <a:r>
-              <a:rPr lang="en-US" smtClean="0"/>
+              <a:rPr lang="en-US"/>
               <a:t>Click to edit Master title style</a:t>
             </a:r>
-            <a:endParaRPr lang="en-US"/>
           </a:p>
         </p:txBody>
       </p:sp>
@@ -3614,7 +3389,7 @@
           <a:p>
             <a:pPr lvl="0"/>
             <a:r>
-              <a:rPr lang="en-US" smtClean="0"/>
+              <a:rPr lang="en-US"/>
               <a:t>Click to edit Master text styles</a:t>
             </a:r>
           </a:p>
@@ -3637,7 +3412,7 @@
           <a:p>
             <a:fld id="{5BCAD085-E8A6-8845-BD4E-CB4CCA059FC4}" type="datetimeFigureOut">
               <a:rPr lang="en-US" smtClean="0"/>
-              <a:t>1/27/13</a:t>
+              <a:t>10/23/26</a:t>
             </a:fld>
             <a:endParaRPr lang="en-US"/>
           </a:p>
@@ -3746,10 +3521,9 @@
           <a:lstStyle/>
           <a:p>
             <a:r>
-              <a:rPr lang="en-US" smtClean="0"/>
+              <a:rPr lang="en-US"/>
               <a:t>Click to edit Master title style</a:t>
             </a:r>
-            <a:endParaRPr lang="en-US"/>
           </a:p>
         </p:txBody>
       </p:sp>
@@ -3780,38 +3554,37 @@
           <a:p>
             <a:pPr lvl="0"/>
             <a:r>
-              <a:rPr lang="en-US" smtClean="0"/>
+              <a:rPr lang="en-US"/>
               <a:t>Click to edit Master text styles</a:t>
             </a:r>
           </a:p>
           <a:p>
             <a:pPr lvl="1"/>
             <a:r>
-              <a:rPr lang="en-US" smtClean="0"/>
+              <a:rPr lang="en-US"/>
               <a:t>Second level</a:t>
             </a:r>
           </a:p>
           <a:p>
             <a:pPr lvl="2"/>
             <a:r>
-              <a:rPr lang="en-US" smtClean="0"/>
+              <a:rPr lang="en-US"/>
               <a:t>Third level</a:t>
             </a:r>
           </a:p>
           <a:p>
             <a:pPr lvl="3"/>
             <a:r>
-              <a:rPr lang="en-US" smtClean="0"/>
+              <a:rPr lang="en-US"/>
               <a:t>Fourth level</a:t>
             </a:r>
           </a:p>
           <a:p>
             <a:pPr lvl="4"/>
             <a:r>
-              <a:rPr lang="en-US" smtClean="0"/>
+              <a:rPr lang="en-US"/>
               <a:t>Fifth level</a:t>
             </a:r>
-            <a:endParaRPr lang="en-US"/>
           </a:p>
         </p:txBody>
       </p:sp>
@@ -3850,7 +3623,7 @@
           <a:p>
             <a:fld id="{5BCAD085-E8A6-8845-BD4E-CB4CCA059FC4}" type="datetimeFigureOut">
               <a:rPr lang="en-US" smtClean="0"/>
-              <a:t>1/27/13</a:t>
+              <a:t>10/23/26</a:t>
             </a:fld>
             <a:endParaRPr lang="en-US"/>
           </a:p>
@@ -4209,7 +3982,7 @@
 </file>
 
 <file path=ppt/slides/slide1.xml><?xml version="1.0" encoding="utf-8"?>
-<p:sld xmlns:a="http://schemas.openxmlformats.org/drawingml/2006/main" xmlns:p="http://schemas.openxmlformats.org/presentationml/2006/main" xmlns:r="http://schemas.openxmlformats.org/officeDocument/2006/relationships">
+<p:sld xmlns:a="http://schemas.openxmlformats.org/drawingml/2006/main" xmlns:r="http://schemas.openxmlformats.org/officeDocument/2006/relationships" xmlns:p="http://schemas.openxmlformats.org/presentationml/2006/main">
   <p:cSld>
     <p:bg>
       <p:bgPr>
@@ -4225,7 +3998,14 @@
         <p:cNvGrpSpPr/>
         <p:nvPr/>
       </p:nvGrpSpPr>
-      <p:grpSpPr/>
+      <p:grpSpPr>
+        <a:xfrm>
+          <a:off x="0" y="0"/>
+          <a:ext cx="0" cy="0"/>
+          <a:chOff x="0" y="0"/>
+          <a:chExt cx="0" cy="0"/>
+        </a:xfrm>
+      </p:grpSpPr>
       <p:sp>
         <p:nvSpPr>
           <p:cNvPr id="2" name="TextBox 1"/>
@@ -4243,7 +4023,7 @@
           <a:noFill/>
         </p:spPr>
         <p:txBody>
-          <a:bodyPr wrap="square" lIns="0" rIns="0" tIns="0" bIns="0">
+          <a:bodyPr wrap="square" lIns="0" tIns="0" rIns="0" bIns="0">
             <a:spAutoFit/>
           </a:bodyPr>
           <a:lstStyle/>
@@ -4282,7 +4062,7 @@
           <a:noFill/>
         </p:spPr>
         <p:txBody>
-          <a:bodyPr wrap="square" lIns="0" rIns="0" tIns="0" bIns="0">
+          <a:bodyPr wrap="square" lIns="0" tIns="0" rIns="0" bIns="0">
             <a:spAutoFit/>
           </a:bodyPr>
           <a:lstStyle/>
@@ -4293,7 +4073,7 @@
               </a:lnSpc>
             </a:pPr>
             <a:r>
-              <a:rPr sz="6600" b="1">
+              <a:rPr sz="6600" b="1" dirty="0" err="1">
                 <a:solidFill>
                   <a:srgbClr val="1A1A1A"/>
                 </a:solidFill>
@@ -4301,6 +4081,21 @@
               </a:rPr>
               <a:t>Memoria</a:t>
             </a:r>
+            <a:r>
+              <a:rPr lang="en-US" sz="6600" b="1" dirty="0" err="1">
+                <a:solidFill>
+                  <a:srgbClr val="1A1A1A"/>
+                </a:solidFill>
+                <a:latin typeface="Helvetica Neue"/>
+              </a:rPr>
+              <a:t>X</a:t>
+            </a:r>
+            <a:endParaRPr sz="6600" b="1" dirty="0">
+              <a:solidFill>
+                <a:srgbClr val="1A1A1A"/>
+              </a:solidFill>
+              <a:latin typeface="Helvetica Neue"/>
+            </a:endParaRPr>
           </a:p>
         </p:txBody>
       </p:sp>
@@ -4356,7 +4151,7 @@
           <a:noFill/>
         </p:spPr>
         <p:txBody>
-          <a:bodyPr wrap="square" lIns="0" rIns="0" tIns="0" bIns="0">
+          <a:bodyPr wrap="square" lIns="0" tIns="0" rIns="0" bIns="0">
             <a:spAutoFit/>
           </a:bodyPr>
           <a:lstStyle/>
@@ -4411,7 +4206,7 @@
           <a:noFill/>
         </p:spPr>
         <p:txBody>
-          <a:bodyPr wrap="square" lIns="0" rIns="0" tIns="0" bIns="0">
+          <a:bodyPr wrap="square" lIns="0" tIns="0" rIns="0" bIns="0">
             <a:spAutoFit/>
           </a:bodyPr>
           <a:lstStyle/>
@@ -4442,7 +4237,7 @@
 </file>
 
 <file path=ppt/slides/slide10.xml><?xml version="1.0" encoding="utf-8"?>
-<p:sld xmlns:a="http://schemas.openxmlformats.org/drawingml/2006/main" xmlns:p="http://schemas.openxmlformats.org/presentationml/2006/main" xmlns:r="http://schemas.openxmlformats.org/officeDocument/2006/relationships">
+<p:sld xmlns:a="http://schemas.openxmlformats.org/drawingml/2006/main" xmlns:r="http://schemas.openxmlformats.org/officeDocument/2006/relationships" xmlns:p="http://schemas.openxmlformats.org/presentationml/2006/main">
   <p:cSld>
     <p:bg>
       <p:bgPr>
@@ -4458,7 +4253,14 @@
         <p:cNvGrpSpPr/>
         <p:nvPr/>
       </p:nvGrpSpPr>
-      <p:grpSpPr/>
+      <p:grpSpPr>
+        <a:xfrm>
+          <a:off x="0" y="0"/>
+          <a:ext cx="0" cy="0"/>
+          <a:chOff x="0" y="0"/>
+          <a:chExt cx="0" cy="0"/>
+        </a:xfrm>
+      </p:grpSpPr>
       <p:sp>
         <p:nvSpPr>
           <p:cNvPr id="2" name="TextBox 1"/>
@@ -4476,7 +4278,7 @@
           <a:noFill/>
         </p:spPr>
         <p:txBody>
-          <a:bodyPr wrap="square" lIns="0" rIns="0" tIns="0" bIns="0">
+          <a:bodyPr wrap="square" lIns="0" tIns="0" rIns="0" bIns="0">
             <a:spAutoFit/>
           </a:bodyPr>
           <a:lstStyle/>
@@ -4515,7 +4317,7 @@
           <a:noFill/>
         </p:spPr>
         <p:txBody>
-          <a:bodyPr wrap="square" lIns="0" rIns="0" tIns="0" bIns="0">
+          <a:bodyPr wrap="square" lIns="0" tIns="0" rIns="0" bIns="0">
             <a:spAutoFit/>
           </a:bodyPr>
           <a:lstStyle/>
@@ -4589,7 +4391,7 @@
           <a:noFill/>
         </p:spPr>
         <p:txBody>
-          <a:bodyPr wrap="square" lIns="0" rIns="0" tIns="0" bIns="0">
+          <a:bodyPr wrap="square" lIns="0" tIns="0" rIns="0" bIns="0">
             <a:spAutoFit/>
           </a:bodyPr>
           <a:lstStyle/>
@@ -4628,7 +4430,7 @@
           <a:noFill/>
         </p:spPr>
         <p:txBody>
-          <a:bodyPr wrap="square" lIns="0" rIns="0" tIns="0" bIns="0">
+          <a:bodyPr wrap="square" lIns="0" tIns="0" rIns="0" bIns="0">
             <a:spAutoFit/>
           </a:bodyPr>
           <a:lstStyle/>
@@ -4667,7 +4469,7 @@
           <a:noFill/>
         </p:spPr>
         <p:txBody>
-          <a:bodyPr wrap="square" lIns="0" rIns="0" tIns="0" bIns="0">
+          <a:bodyPr wrap="square" lIns="0" tIns="0" rIns="0" bIns="0">
             <a:spAutoFit/>
           </a:bodyPr>
           <a:lstStyle/>
@@ -4706,7 +4508,7 @@
           <a:noFill/>
         </p:spPr>
         <p:txBody>
-          <a:bodyPr wrap="square" lIns="0" rIns="0" tIns="0" bIns="0">
+          <a:bodyPr wrap="square" lIns="0" tIns="0" rIns="0" bIns="0">
             <a:spAutoFit/>
           </a:bodyPr>
           <a:lstStyle/>
@@ -4745,7 +4547,7 @@
           <a:noFill/>
         </p:spPr>
         <p:txBody>
-          <a:bodyPr wrap="square" lIns="0" rIns="0" tIns="0" bIns="0">
+          <a:bodyPr wrap="square" lIns="0" tIns="0" rIns="0" bIns="0">
             <a:spAutoFit/>
           </a:bodyPr>
           <a:lstStyle/>
@@ -4784,7 +4586,7 @@
           <a:noFill/>
         </p:spPr>
         <p:txBody>
-          <a:bodyPr wrap="square" lIns="0" rIns="0" tIns="0" bIns="0">
+          <a:bodyPr wrap="square" lIns="0" tIns="0" rIns="0" bIns="0">
             <a:spAutoFit/>
           </a:bodyPr>
           <a:lstStyle/>
@@ -4823,7 +4625,7 @@
           <a:noFill/>
         </p:spPr>
         <p:txBody>
-          <a:bodyPr wrap="square" lIns="0" rIns="0" tIns="0" bIns="0">
+          <a:bodyPr wrap="square" lIns="0" tIns="0" rIns="0" bIns="0">
             <a:spAutoFit/>
           </a:bodyPr>
           <a:lstStyle/>
@@ -4862,7 +4664,7 @@
           <a:noFill/>
         </p:spPr>
         <p:txBody>
-          <a:bodyPr wrap="square" lIns="0" rIns="0" tIns="0" bIns="0">
+          <a:bodyPr wrap="square" lIns="0" tIns="0" rIns="0" bIns="0">
             <a:spAutoFit/>
           </a:bodyPr>
           <a:lstStyle/>
@@ -4936,7 +4738,7 @@
           <a:noFill/>
         </p:spPr>
         <p:txBody>
-          <a:bodyPr wrap="square" lIns="0" rIns="0" tIns="0" bIns="0">
+          <a:bodyPr wrap="square" lIns="0" tIns="0" rIns="0" bIns="0">
             <a:spAutoFit/>
           </a:bodyPr>
           <a:lstStyle/>
@@ -4999,7 +4801,7 @@
 </file>
 
 <file path=ppt/slides/slide11.xml><?xml version="1.0" encoding="utf-8"?>
-<p:sld xmlns:a="http://schemas.openxmlformats.org/drawingml/2006/main" xmlns:p="http://schemas.openxmlformats.org/presentationml/2006/main" xmlns:r="http://schemas.openxmlformats.org/officeDocument/2006/relationships">
+<p:sld xmlns:a="http://schemas.openxmlformats.org/drawingml/2006/main" xmlns:r="http://schemas.openxmlformats.org/officeDocument/2006/relationships" xmlns:p="http://schemas.openxmlformats.org/presentationml/2006/main">
   <p:cSld>
     <p:bg>
       <p:bgPr>
@@ -5015,7 +4817,14 @@
         <p:cNvGrpSpPr/>
         <p:nvPr/>
       </p:nvGrpSpPr>
-      <p:grpSpPr/>
+      <p:grpSpPr>
+        <a:xfrm>
+          <a:off x="0" y="0"/>
+          <a:ext cx="0" cy="0"/>
+          <a:chOff x="0" y="0"/>
+          <a:chExt cx="0" cy="0"/>
+        </a:xfrm>
+      </p:grpSpPr>
       <p:sp>
         <p:nvSpPr>
           <p:cNvPr id="2" name="TextBox 1"/>
@@ -5033,7 +4842,7 @@
           <a:noFill/>
         </p:spPr>
         <p:txBody>
-          <a:bodyPr wrap="square" lIns="0" rIns="0" tIns="0" bIns="0">
+          <a:bodyPr wrap="square" lIns="0" tIns="0" rIns="0" bIns="0">
             <a:spAutoFit/>
           </a:bodyPr>
           <a:lstStyle/>
@@ -5072,7 +4881,7 @@
           <a:noFill/>
         </p:spPr>
         <p:txBody>
-          <a:bodyPr wrap="square" lIns="0" rIns="0" tIns="0" bIns="0">
+          <a:bodyPr wrap="square" lIns="0" tIns="0" rIns="0" bIns="0">
             <a:spAutoFit/>
           </a:bodyPr>
           <a:lstStyle/>
@@ -5146,7 +4955,7 @@
           <a:noFill/>
         </p:spPr>
         <p:txBody>
-          <a:bodyPr wrap="square" lIns="0" rIns="0" tIns="0" bIns="0">
+          <a:bodyPr wrap="square" lIns="0" tIns="0" rIns="0" bIns="0">
             <a:spAutoFit/>
           </a:bodyPr>
           <a:lstStyle/>
@@ -5185,7 +4994,7 @@
           <a:noFill/>
         </p:spPr>
         <p:txBody>
-          <a:bodyPr wrap="square" lIns="0" rIns="0" tIns="0" bIns="0">
+          <a:bodyPr wrap="square" lIns="0" tIns="0" rIns="0" bIns="0">
             <a:spAutoFit/>
           </a:bodyPr>
           <a:lstStyle/>
@@ -5196,7 +5005,7 @@
               </a:lnSpc>
             </a:pPr>
             <a:r>
-              <a:rPr sz="1500" b="0">
+              <a:rPr sz="1500" b="0" dirty="0">
                 <a:solidFill>
                   <a:srgbClr val="1A1A1A"/>
                 </a:solidFill>
@@ -5212,13 +5021,31 @@
               </a:lnSpc>
             </a:pPr>
             <a:r>
-              <a:rPr sz="1500" b="0">
+              <a:rPr sz="1500" b="0" dirty="0">
                 <a:solidFill>
                   <a:srgbClr val="1A1A1A"/>
                 </a:solidFill>
                 <a:latin typeface="Helvetica Neue"/>
               </a:rPr>
-              <a:t>Kokoro voice in Podman, through the API</a:t>
+              <a:t>Kokoro voice in </a:t>
+            </a:r>
+            <a:r>
+              <a:rPr sz="1500" b="0" dirty="0" err="1">
+                <a:solidFill>
+                  <a:srgbClr val="1A1A1A"/>
+                </a:solidFill>
+                <a:latin typeface="Helvetica Neue"/>
+              </a:rPr>
+              <a:t>Podman</a:t>
+            </a:r>
+            <a:r>
+              <a:rPr sz="1500" b="0" dirty="0">
+                <a:solidFill>
+                  <a:srgbClr val="1A1A1A"/>
+                </a:solidFill>
+                <a:latin typeface="Helvetica Neue"/>
+              </a:rPr>
+              <a:t>, through the API</a:t>
             </a:r>
           </a:p>
           <a:p>
@@ -5228,7 +5055,7 @@
               </a:lnSpc>
             </a:pPr>
             <a:r>
-              <a:rPr sz="1500" b="0">
+              <a:rPr sz="1500" b="0" dirty="0">
                 <a:solidFill>
                   <a:srgbClr val="1A1A1A"/>
                 </a:solidFill>
@@ -5244,7 +5071,7 @@
               </a:lnSpc>
             </a:pPr>
             <a:r>
-              <a:rPr sz="1500" b="0">
+              <a:rPr sz="1500" b="0" dirty="0">
                 <a:solidFill>
                   <a:srgbClr val="1A1A1A"/>
                 </a:solidFill>
@@ -5288,7 +5115,7 @@
           <a:noFill/>
         </p:spPr>
         <p:txBody>
-          <a:bodyPr wrap="square" lIns="0" rIns="0" tIns="0" bIns="0">
+          <a:bodyPr wrap="square" lIns="0" tIns="0" rIns="0" bIns="0">
             <a:spAutoFit/>
           </a:bodyPr>
           <a:lstStyle/>
@@ -5327,7 +5154,7 @@
           <a:noFill/>
         </p:spPr>
         <p:txBody>
-          <a:bodyPr wrap="square" lIns="0" rIns="0" tIns="0" bIns="0">
+          <a:bodyPr wrap="square" lIns="0" tIns="0" rIns="0" bIns="0">
             <a:spAutoFit/>
           </a:bodyPr>
           <a:lstStyle/>
@@ -5422,7 +5249,7 @@
 </file>
 
 <file path=ppt/slides/slide2.xml><?xml version="1.0" encoding="utf-8"?>
-<p:sld xmlns:a="http://schemas.openxmlformats.org/drawingml/2006/main" xmlns:p="http://schemas.openxmlformats.org/presentationml/2006/main" xmlns:r="http://schemas.openxmlformats.org/officeDocument/2006/relationships">
+<p:sld xmlns:a="http://schemas.openxmlformats.org/drawingml/2006/main" xmlns:r="http://schemas.openxmlformats.org/officeDocument/2006/relationships" xmlns:p="http://schemas.openxmlformats.org/presentationml/2006/main">
   <p:cSld>
     <p:bg>
       <p:bgPr>
@@ -5438,7 +5265,14 @@
         <p:cNvGrpSpPr/>
         <p:nvPr/>
       </p:nvGrpSpPr>
-      <p:grpSpPr/>
+      <p:grpSpPr>
+        <a:xfrm>
+          <a:off x="0" y="0"/>
+          <a:ext cx="0" cy="0"/>
+          <a:chOff x="0" y="0"/>
+          <a:chExt cx="0" cy="0"/>
+        </a:xfrm>
+      </p:grpSpPr>
       <p:sp>
         <p:nvSpPr>
           <p:cNvPr id="2" name="TextBox 1"/>
@@ -5456,7 +5290,7 @@
           <a:noFill/>
         </p:spPr>
         <p:txBody>
-          <a:bodyPr wrap="square" lIns="0" rIns="0" tIns="0" bIns="0">
+          <a:bodyPr wrap="square" lIns="0" tIns="0" rIns="0" bIns="0">
             <a:spAutoFit/>
           </a:bodyPr>
           <a:lstStyle/>
@@ -5495,7 +5329,7 @@
           <a:noFill/>
         </p:spPr>
         <p:txBody>
-          <a:bodyPr wrap="square" lIns="0" rIns="0" tIns="0" bIns="0">
+          <a:bodyPr wrap="square" lIns="0" tIns="0" rIns="0" bIns="0">
             <a:spAutoFit/>
           </a:bodyPr>
           <a:lstStyle/>
@@ -5595,6 +5429,7 @@
           <a:lstStyle/>
           <a:p>
             <a:pPr algn="ctr"/>
+            <a:endParaRPr/>
           </a:p>
         </p:txBody>
       </p:sp>
@@ -5615,7 +5450,7 @@
           <a:noFill/>
         </p:spPr>
         <p:txBody>
-          <a:bodyPr wrap="square" lIns="0" rIns="0" tIns="0" bIns="0">
+          <a:bodyPr wrap="square" lIns="0" tIns="0" rIns="0" bIns="0">
             <a:spAutoFit/>
           </a:bodyPr>
           <a:lstStyle/>
@@ -5654,7 +5489,7 @@
           <a:noFill/>
         </p:spPr>
         <p:txBody>
-          <a:bodyPr wrap="square" lIns="0" rIns="0" tIns="0" bIns="0">
+          <a:bodyPr wrap="square" lIns="0" tIns="0" rIns="0" bIns="0">
             <a:spAutoFit/>
           </a:bodyPr>
           <a:lstStyle/>
@@ -5719,6 +5554,7 @@
           <a:lstStyle/>
           <a:p>
             <a:pPr algn="ctr"/>
+            <a:endParaRPr/>
           </a:p>
         </p:txBody>
       </p:sp>
@@ -5739,7 +5575,7 @@
           <a:noFill/>
         </p:spPr>
         <p:txBody>
-          <a:bodyPr wrap="square" lIns="0" rIns="0" tIns="0" bIns="0">
+          <a:bodyPr wrap="square" lIns="0" tIns="0" rIns="0" bIns="0">
             <a:spAutoFit/>
           </a:bodyPr>
           <a:lstStyle/>
@@ -5778,7 +5614,7 @@
           <a:noFill/>
         </p:spPr>
         <p:txBody>
-          <a:bodyPr wrap="square" lIns="0" rIns="0" tIns="0" bIns="0">
+          <a:bodyPr wrap="square" lIns="0" tIns="0" rIns="0" bIns="0">
             <a:spAutoFit/>
           </a:bodyPr>
           <a:lstStyle/>
@@ -5843,6 +5679,7 @@
           <a:lstStyle/>
           <a:p>
             <a:pPr algn="ctr"/>
+            <a:endParaRPr/>
           </a:p>
         </p:txBody>
       </p:sp>
@@ -5863,7 +5700,7 @@
           <a:noFill/>
         </p:spPr>
         <p:txBody>
-          <a:bodyPr wrap="square" lIns="0" rIns="0" tIns="0" bIns="0">
+          <a:bodyPr wrap="square" lIns="0" tIns="0" rIns="0" bIns="0">
             <a:spAutoFit/>
           </a:bodyPr>
           <a:lstStyle/>
@@ -5902,7 +5739,7 @@
           <a:noFill/>
         </p:spPr>
         <p:txBody>
-          <a:bodyPr wrap="square" lIns="0" rIns="0" tIns="0" bIns="0">
+          <a:bodyPr wrap="square" lIns="0" tIns="0" rIns="0" bIns="0">
             <a:spAutoFit/>
           </a:bodyPr>
           <a:lstStyle/>
@@ -5941,7 +5778,7 @@
           <a:noFill/>
         </p:spPr>
         <p:txBody>
-          <a:bodyPr wrap="square" lIns="0" rIns="0" tIns="0" bIns="0">
+          <a:bodyPr wrap="square" lIns="0" tIns="0" rIns="0" bIns="0">
             <a:spAutoFit/>
           </a:bodyPr>
           <a:lstStyle/>
@@ -5972,7 +5809,7 @@
 </file>
 
 <file path=ppt/slides/slide3.xml><?xml version="1.0" encoding="utf-8"?>
-<p:sld xmlns:a="http://schemas.openxmlformats.org/drawingml/2006/main" xmlns:p="http://schemas.openxmlformats.org/presentationml/2006/main" xmlns:r="http://schemas.openxmlformats.org/officeDocument/2006/relationships">
+<p:sld xmlns:a="http://schemas.openxmlformats.org/drawingml/2006/main" xmlns:r="http://schemas.openxmlformats.org/officeDocument/2006/relationships" xmlns:p="http://schemas.openxmlformats.org/presentationml/2006/main">
   <p:cSld>
     <p:bg>
       <p:bgPr>
@@ -5988,7 +5825,14 @@
         <p:cNvGrpSpPr/>
         <p:nvPr/>
       </p:nvGrpSpPr>
-      <p:grpSpPr/>
+      <p:grpSpPr>
+        <a:xfrm>
+          <a:off x="0" y="0"/>
+          <a:ext cx="0" cy="0"/>
+          <a:chOff x="0" y="0"/>
+          <a:chExt cx="0" cy="0"/>
+        </a:xfrm>
+      </p:grpSpPr>
       <p:sp>
         <p:nvSpPr>
           <p:cNvPr id="2" name="TextBox 1"/>
@@ -6006,7 +5850,7 @@
           <a:noFill/>
         </p:spPr>
         <p:txBody>
-          <a:bodyPr wrap="square" lIns="0" rIns="0" tIns="0" bIns="0">
+          <a:bodyPr wrap="square" lIns="0" tIns="0" rIns="0" bIns="0">
             <a:spAutoFit/>
           </a:bodyPr>
           <a:lstStyle/>
@@ -6045,7 +5889,7 @@
           <a:noFill/>
         </p:spPr>
         <p:txBody>
-          <a:bodyPr wrap="square" lIns="0" rIns="0" tIns="0" bIns="0">
+          <a:bodyPr wrap="square" lIns="0" tIns="0" rIns="0" bIns="0">
             <a:spAutoFit/>
           </a:bodyPr>
           <a:lstStyle/>
@@ -6119,7 +5963,7 @@
           <a:noFill/>
         </p:spPr>
         <p:txBody>
-          <a:bodyPr wrap="square" lIns="0" rIns="0" tIns="0" bIns="0">
+          <a:bodyPr wrap="square" lIns="0" tIns="0" rIns="0" bIns="0">
             <a:spAutoFit/>
           </a:bodyPr>
           <a:lstStyle/>
@@ -6193,7 +6037,7 @@
           <a:noFill/>
         </p:spPr>
         <p:txBody>
-          <a:bodyPr wrap="square" lIns="0" rIns="0" tIns="0" bIns="0">
+          <a:bodyPr wrap="square" lIns="0" tIns="0" rIns="0" bIns="0">
             <a:spAutoFit/>
           </a:bodyPr>
           <a:lstStyle/>
@@ -6232,7 +6076,7 @@
           <a:noFill/>
         </p:spPr>
         <p:txBody>
-          <a:bodyPr wrap="square" lIns="0" rIns="0" tIns="0" bIns="0">
+          <a:bodyPr wrap="square" lIns="0" tIns="0" rIns="0" bIns="0">
             <a:spAutoFit/>
           </a:bodyPr>
           <a:lstStyle/>
@@ -6303,7 +6147,7 @@
           <a:noFill/>
         </p:spPr>
         <p:txBody>
-          <a:bodyPr wrap="square" lIns="0" rIns="0" tIns="0" bIns="0">
+          <a:bodyPr wrap="square" lIns="0" tIns="0" rIns="0" bIns="0">
             <a:spAutoFit/>
           </a:bodyPr>
           <a:lstStyle/>
@@ -6377,7 +6221,7 @@
           <a:noFill/>
         </p:spPr>
         <p:txBody>
-          <a:bodyPr wrap="square" lIns="0" rIns="0" tIns="0" bIns="0">
+          <a:bodyPr wrap="square" lIns="0" tIns="0" rIns="0" bIns="0">
             <a:spAutoFit/>
           </a:bodyPr>
           <a:lstStyle/>
@@ -6416,7 +6260,7 @@
           <a:noFill/>
         </p:spPr>
         <p:txBody>
-          <a:bodyPr wrap="square" lIns="0" rIns="0" tIns="0" bIns="0">
+          <a:bodyPr wrap="square" lIns="0" tIns="0" rIns="0" bIns="0">
             <a:spAutoFit/>
           </a:bodyPr>
           <a:lstStyle/>
@@ -6487,7 +6331,7 @@
           <a:noFill/>
         </p:spPr>
         <p:txBody>
-          <a:bodyPr wrap="square" lIns="0" rIns="0" tIns="0" bIns="0">
+          <a:bodyPr wrap="square" lIns="0" tIns="0" rIns="0" bIns="0">
             <a:spAutoFit/>
           </a:bodyPr>
           <a:lstStyle/>
@@ -6561,7 +6405,7 @@
           <a:noFill/>
         </p:spPr>
         <p:txBody>
-          <a:bodyPr wrap="square" lIns="0" rIns="0" tIns="0" bIns="0">
+          <a:bodyPr wrap="square" lIns="0" tIns="0" rIns="0" bIns="0">
             <a:spAutoFit/>
           </a:bodyPr>
           <a:lstStyle/>
@@ -6600,7 +6444,7 @@
           <a:noFill/>
         </p:spPr>
         <p:txBody>
-          <a:bodyPr wrap="square" lIns="0" rIns="0" tIns="0" bIns="0">
+          <a:bodyPr wrap="square" lIns="0" tIns="0" rIns="0" bIns="0">
             <a:spAutoFit/>
           </a:bodyPr>
           <a:lstStyle/>
@@ -6671,7 +6515,7 @@
           <a:noFill/>
         </p:spPr>
         <p:txBody>
-          <a:bodyPr wrap="square" lIns="0" rIns="0" tIns="0" bIns="0">
+          <a:bodyPr wrap="square" lIns="0" tIns="0" rIns="0" bIns="0">
             <a:spAutoFit/>
           </a:bodyPr>
           <a:lstStyle/>
@@ -6745,7 +6589,7 @@
           <a:noFill/>
         </p:spPr>
         <p:txBody>
-          <a:bodyPr wrap="square" lIns="0" rIns="0" tIns="0" bIns="0">
+          <a:bodyPr wrap="square" lIns="0" tIns="0" rIns="0" bIns="0">
             <a:spAutoFit/>
           </a:bodyPr>
           <a:lstStyle/>
@@ -6784,7 +6628,7 @@
           <a:noFill/>
         </p:spPr>
         <p:txBody>
-          <a:bodyPr wrap="square" lIns="0" rIns="0" tIns="0" bIns="0">
+          <a:bodyPr wrap="square" lIns="0" tIns="0" rIns="0" bIns="0">
             <a:spAutoFit/>
           </a:bodyPr>
           <a:lstStyle/>
@@ -6855,7 +6699,7 @@
           <a:noFill/>
         </p:spPr>
         <p:txBody>
-          <a:bodyPr wrap="square" lIns="0" rIns="0" tIns="0" bIns="0">
+          <a:bodyPr wrap="square" lIns="0" tIns="0" rIns="0" bIns="0">
             <a:spAutoFit/>
           </a:bodyPr>
           <a:lstStyle/>
@@ -6929,7 +6773,7 @@
           <a:noFill/>
         </p:spPr>
         <p:txBody>
-          <a:bodyPr wrap="square" lIns="0" rIns="0" tIns="0" bIns="0">
+          <a:bodyPr wrap="square" lIns="0" tIns="0" rIns="0" bIns="0">
             <a:spAutoFit/>
           </a:bodyPr>
           <a:lstStyle/>
@@ -6968,7 +6812,7 @@
           <a:noFill/>
         </p:spPr>
         <p:txBody>
-          <a:bodyPr wrap="square" lIns="0" rIns="0" tIns="0" bIns="0">
+          <a:bodyPr wrap="square" lIns="0" tIns="0" rIns="0" bIns="0">
             <a:spAutoFit/>
           </a:bodyPr>
           <a:lstStyle/>
@@ -7039,7 +6883,7 @@
           <a:noFill/>
         </p:spPr>
         <p:txBody>
-          <a:bodyPr wrap="square" lIns="0" rIns="0" tIns="0" bIns="0">
+          <a:bodyPr wrap="square" lIns="0" tIns="0" rIns="0" bIns="0">
             <a:spAutoFit/>
           </a:bodyPr>
           <a:lstStyle/>
@@ -7113,7 +6957,7 @@
           <a:noFill/>
         </p:spPr>
         <p:txBody>
-          <a:bodyPr wrap="square" lIns="0" rIns="0" tIns="0" bIns="0">
+          <a:bodyPr wrap="square" lIns="0" tIns="0" rIns="0" bIns="0">
             <a:spAutoFit/>
           </a:bodyPr>
           <a:lstStyle/>
@@ -7152,7 +6996,7 @@
           <a:noFill/>
         </p:spPr>
         <p:txBody>
-          <a:bodyPr wrap="square" lIns="0" rIns="0" tIns="0" bIns="0">
+          <a:bodyPr wrap="square" lIns="0" tIns="0" rIns="0" bIns="0">
             <a:spAutoFit/>
           </a:bodyPr>
           <a:lstStyle/>
@@ -7223,7 +7067,7 @@
           <a:noFill/>
         </p:spPr>
         <p:txBody>
-          <a:bodyPr wrap="square" lIns="0" rIns="0" tIns="0" bIns="0">
+          <a:bodyPr wrap="square" lIns="0" tIns="0" rIns="0" bIns="0">
             <a:spAutoFit/>
           </a:bodyPr>
           <a:lstStyle/>
@@ -7270,7 +7114,7 @@
 </file>
 
 <file path=ppt/slides/slide4.xml><?xml version="1.0" encoding="utf-8"?>
-<p:sld xmlns:a="http://schemas.openxmlformats.org/drawingml/2006/main" xmlns:p="http://schemas.openxmlformats.org/presentationml/2006/main" xmlns:r="http://schemas.openxmlformats.org/officeDocument/2006/relationships">
+<p:sld xmlns:a="http://schemas.openxmlformats.org/drawingml/2006/main" xmlns:r="http://schemas.openxmlformats.org/officeDocument/2006/relationships" xmlns:p="http://schemas.openxmlformats.org/presentationml/2006/main">
   <p:cSld>
     <p:bg>
       <p:bgPr>
@@ -7286,7 +7130,14 @@
         <p:cNvGrpSpPr/>
         <p:nvPr/>
       </p:nvGrpSpPr>
-      <p:grpSpPr/>
+      <p:grpSpPr>
+        <a:xfrm>
+          <a:off x="0" y="0"/>
+          <a:ext cx="0" cy="0"/>
+          <a:chOff x="0" y="0"/>
+          <a:chExt cx="0" cy="0"/>
+        </a:xfrm>
+      </p:grpSpPr>
       <p:sp>
         <p:nvSpPr>
           <p:cNvPr id="2" name="TextBox 1"/>
@@ -7304,7 +7155,7 @@
           <a:noFill/>
         </p:spPr>
         <p:txBody>
-          <a:bodyPr wrap="square" lIns="0" rIns="0" tIns="0" bIns="0">
+          <a:bodyPr wrap="square" lIns="0" tIns="0" rIns="0" bIns="0">
             <a:spAutoFit/>
           </a:bodyPr>
           <a:lstStyle/>
@@ -7343,7 +7194,7 @@
           <a:noFill/>
         </p:spPr>
         <p:txBody>
-          <a:bodyPr wrap="square" lIns="0" rIns="0" tIns="0" bIns="0">
+          <a:bodyPr wrap="square" lIns="0" tIns="0" rIns="0" bIns="0">
             <a:spAutoFit/>
           </a:bodyPr>
           <a:lstStyle/>
@@ -7447,7 +7298,7 @@
           <a:noFill/>
         </p:spPr>
         <p:txBody>
-          <a:bodyPr wrap="square" lIns="0" rIns="0" tIns="0" bIns="0">
+          <a:bodyPr wrap="square" lIns="0" tIns="0" rIns="0" bIns="0">
             <a:spAutoFit/>
           </a:bodyPr>
           <a:lstStyle/>
@@ -7486,7 +7337,7 @@
           <a:noFill/>
         </p:spPr>
         <p:txBody>
-          <a:bodyPr wrap="square" lIns="0" rIns="0" tIns="0" bIns="0">
+          <a:bodyPr wrap="square" lIns="0" tIns="0" rIns="0" bIns="0">
             <a:spAutoFit/>
           </a:bodyPr>
           <a:lstStyle/>
@@ -7525,7 +7376,7 @@
           <a:noFill/>
         </p:spPr>
         <p:txBody>
-          <a:bodyPr wrap="square" lIns="0" rIns="0" tIns="0" bIns="0">
+          <a:bodyPr wrap="square" lIns="0" tIns="0" rIns="0" bIns="0">
             <a:spAutoFit/>
           </a:bodyPr>
           <a:lstStyle/>
@@ -7564,7 +7415,7 @@
           <a:noFill/>
         </p:spPr>
         <p:txBody>
-          <a:bodyPr wrap="square" lIns="0" rIns="0" tIns="0" bIns="0">
+          <a:bodyPr wrap="square" lIns="0" tIns="0" rIns="0" bIns="0">
             <a:spAutoFit/>
           </a:bodyPr>
           <a:lstStyle/>
@@ -7603,7 +7454,7 @@
           <a:noFill/>
         </p:spPr>
         <p:txBody>
-          <a:bodyPr wrap="square" lIns="0" rIns="0" tIns="0" bIns="0">
+          <a:bodyPr wrap="square" lIns="0" tIns="0" rIns="0" bIns="0">
             <a:spAutoFit/>
           </a:bodyPr>
           <a:lstStyle/>
@@ -7642,7 +7493,7 @@
           <a:noFill/>
         </p:spPr>
         <p:txBody>
-          <a:bodyPr wrap="square" lIns="0" rIns="0" tIns="0" bIns="0">
+          <a:bodyPr wrap="square" lIns="0" tIns="0" rIns="0" bIns="0">
             <a:spAutoFit/>
           </a:bodyPr>
           <a:lstStyle/>
@@ -7673,7 +7524,7 @@
 </file>
 
 <file path=ppt/slides/slide5.xml><?xml version="1.0" encoding="utf-8"?>
-<p:sld xmlns:a="http://schemas.openxmlformats.org/drawingml/2006/main" xmlns:p="http://schemas.openxmlformats.org/presentationml/2006/main" xmlns:r="http://schemas.openxmlformats.org/officeDocument/2006/relationships">
+<p:sld xmlns:a="http://schemas.openxmlformats.org/drawingml/2006/main" xmlns:r="http://schemas.openxmlformats.org/officeDocument/2006/relationships" xmlns:p="http://schemas.openxmlformats.org/presentationml/2006/main">
   <p:cSld>
     <p:bg>
       <p:bgPr>
@@ -7689,7 +7540,14 @@
         <p:cNvGrpSpPr/>
         <p:nvPr/>
       </p:nvGrpSpPr>
-      <p:grpSpPr/>
+      <p:grpSpPr>
+        <a:xfrm>
+          <a:off x="0" y="0"/>
+          <a:ext cx="0" cy="0"/>
+          <a:chOff x="0" y="0"/>
+          <a:chExt cx="0" cy="0"/>
+        </a:xfrm>
+      </p:grpSpPr>
       <p:sp>
         <p:nvSpPr>
           <p:cNvPr id="2" name="TextBox 1"/>
@@ -7707,7 +7565,7 @@
           <a:noFill/>
         </p:spPr>
         <p:txBody>
-          <a:bodyPr wrap="square" lIns="0" rIns="0" tIns="0" bIns="0">
+          <a:bodyPr wrap="square" lIns="0" tIns="0" rIns="0" bIns="0">
             <a:spAutoFit/>
           </a:bodyPr>
           <a:lstStyle/>
@@ -7746,7 +7604,7 @@
           <a:noFill/>
         </p:spPr>
         <p:txBody>
-          <a:bodyPr wrap="square" lIns="0" rIns="0" tIns="0" bIns="0">
+          <a:bodyPr wrap="square" lIns="0" tIns="0" rIns="0" bIns="0">
             <a:spAutoFit/>
           </a:bodyPr>
           <a:lstStyle/>
@@ -7842,7 +7700,7 @@
 </file>
 
 <file path=ppt/slides/slide6.xml><?xml version="1.0" encoding="utf-8"?>
-<p:sld xmlns:a="http://schemas.openxmlformats.org/drawingml/2006/main" xmlns:p="http://schemas.openxmlformats.org/presentationml/2006/main" xmlns:r="http://schemas.openxmlformats.org/officeDocument/2006/relationships">
+<p:sld xmlns:a="http://schemas.openxmlformats.org/drawingml/2006/main" xmlns:r="http://schemas.openxmlformats.org/officeDocument/2006/relationships" xmlns:p="http://schemas.openxmlformats.org/presentationml/2006/main">
   <p:cSld>
     <p:bg>
       <p:bgPr>
@@ -7858,7 +7716,14 @@
         <p:cNvGrpSpPr/>
         <p:nvPr/>
       </p:nvGrpSpPr>
-      <p:grpSpPr/>
+      <p:grpSpPr>
+        <a:xfrm>
+          <a:off x="0" y="0"/>
+          <a:ext cx="0" cy="0"/>
+          <a:chOff x="0" y="0"/>
+          <a:chExt cx="0" cy="0"/>
+        </a:xfrm>
+      </p:grpSpPr>
       <p:sp>
         <p:nvSpPr>
           <p:cNvPr id="2" name="TextBox 1"/>
@@ -7876,7 +7741,7 @@
           <a:noFill/>
         </p:spPr>
         <p:txBody>
-          <a:bodyPr wrap="square" lIns="0" rIns="0" tIns="0" bIns="0">
+          <a:bodyPr wrap="square" lIns="0" tIns="0" rIns="0" bIns="0">
             <a:spAutoFit/>
           </a:bodyPr>
           <a:lstStyle/>
@@ -7915,7 +7780,7 @@
           <a:noFill/>
         </p:spPr>
         <p:txBody>
-          <a:bodyPr wrap="square" lIns="0" rIns="0" tIns="0" bIns="0">
+          <a:bodyPr wrap="square" lIns="0" tIns="0" rIns="0" bIns="0">
             <a:spAutoFit/>
           </a:bodyPr>
           <a:lstStyle/>
@@ -7989,7 +7854,7 @@
           <a:noFill/>
         </p:spPr>
         <p:txBody>
-          <a:bodyPr wrap="square" lIns="0" rIns="0" tIns="0" bIns="0">
+          <a:bodyPr wrap="square" lIns="0" tIns="0" rIns="0" bIns="0">
             <a:spAutoFit/>
           </a:bodyPr>
           <a:lstStyle/>
@@ -8054,6 +7919,7 @@
           <a:lstStyle/>
           <a:p>
             <a:pPr algn="ctr"/>
+            <a:endParaRPr/>
           </a:p>
         </p:txBody>
       </p:sp>
@@ -8074,7 +7940,7 @@
           <a:noFill/>
         </p:spPr>
         <p:txBody>
-          <a:bodyPr wrap="square" lIns="0" rIns="0" tIns="0" bIns="0">
+          <a:bodyPr wrap="square" lIns="0" tIns="0" rIns="0" bIns="0">
             <a:spAutoFit/>
           </a:bodyPr>
           <a:lstStyle/>
@@ -8139,6 +8005,7 @@
           <a:lstStyle/>
           <a:p>
             <a:pPr algn="ctr"/>
+            <a:endParaRPr/>
           </a:p>
         </p:txBody>
       </p:sp>
@@ -8159,7 +8026,7 @@
           <a:noFill/>
         </p:spPr>
         <p:txBody>
-          <a:bodyPr wrap="square" lIns="0" rIns="0" tIns="0" bIns="0">
+          <a:bodyPr wrap="square" lIns="0" tIns="0" rIns="0" bIns="0">
             <a:spAutoFit/>
           </a:bodyPr>
           <a:lstStyle/>
@@ -8224,6 +8091,7 @@
           <a:lstStyle/>
           <a:p>
             <a:pPr algn="ctr"/>
+            <a:endParaRPr/>
           </a:p>
         </p:txBody>
       </p:sp>
@@ -8244,7 +8112,7 @@
           <a:noFill/>
         </p:spPr>
         <p:txBody>
-          <a:bodyPr wrap="square" lIns="0" rIns="0" tIns="0" bIns="0">
+          <a:bodyPr wrap="square" lIns="0" tIns="0" rIns="0" bIns="0">
             <a:spAutoFit/>
           </a:bodyPr>
           <a:lstStyle/>
@@ -8318,7 +8186,7 @@
           <a:noFill/>
         </p:spPr>
         <p:txBody>
-          <a:bodyPr wrap="square" lIns="0" rIns="0" tIns="0" bIns="0">
+          <a:bodyPr wrap="square" lIns="0" tIns="0" rIns="0" bIns="0">
             <a:spAutoFit/>
           </a:bodyPr>
           <a:lstStyle/>
@@ -8383,6 +8251,7 @@
           <a:lstStyle/>
           <a:p>
             <a:pPr algn="ctr"/>
+            <a:endParaRPr/>
           </a:p>
         </p:txBody>
       </p:sp>
@@ -8403,7 +8272,7 @@
           <a:noFill/>
         </p:spPr>
         <p:txBody>
-          <a:bodyPr wrap="square" lIns="0" rIns="0" tIns="0" bIns="0">
+          <a:bodyPr wrap="square" lIns="0" tIns="0" rIns="0" bIns="0">
             <a:spAutoFit/>
           </a:bodyPr>
           <a:lstStyle/>
@@ -8468,6 +8337,7 @@
           <a:lstStyle/>
           <a:p>
             <a:pPr algn="ctr"/>
+            <a:endParaRPr/>
           </a:p>
         </p:txBody>
       </p:sp>
@@ -8488,7 +8358,7 @@
           <a:noFill/>
         </p:spPr>
         <p:txBody>
-          <a:bodyPr wrap="square" lIns="0" rIns="0" tIns="0" bIns="0">
+          <a:bodyPr wrap="square" lIns="0" tIns="0" rIns="0" bIns="0">
             <a:spAutoFit/>
           </a:bodyPr>
           <a:lstStyle/>
@@ -8553,6 +8423,7 @@
           <a:lstStyle/>
           <a:p>
             <a:pPr algn="ctr"/>
+            <a:endParaRPr/>
           </a:p>
         </p:txBody>
       </p:sp>
@@ -8573,7 +8444,7 @@
           <a:noFill/>
         </p:spPr>
         <p:txBody>
-          <a:bodyPr wrap="square" lIns="0" rIns="0" tIns="0" bIns="0">
+          <a:bodyPr wrap="square" lIns="0" tIns="0" rIns="0" bIns="0">
             <a:spAutoFit/>
           </a:bodyPr>
           <a:lstStyle/>
@@ -8647,7 +8518,7 @@
           <a:noFill/>
         </p:spPr>
         <p:txBody>
-          <a:bodyPr wrap="square" lIns="0" rIns="0" tIns="0" bIns="0">
+          <a:bodyPr wrap="square" lIns="0" tIns="0" rIns="0" bIns="0">
             <a:spAutoFit/>
           </a:bodyPr>
           <a:lstStyle/>
@@ -8712,6 +8583,7 @@
           <a:lstStyle/>
           <a:p>
             <a:pPr algn="ctr"/>
+            <a:endParaRPr/>
           </a:p>
         </p:txBody>
       </p:sp>
@@ -8732,7 +8604,7 @@
           <a:noFill/>
         </p:spPr>
         <p:txBody>
-          <a:bodyPr wrap="square" lIns="0" rIns="0" tIns="0" bIns="0">
+          <a:bodyPr wrap="square" lIns="0" tIns="0" rIns="0" bIns="0">
             <a:spAutoFit/>
           </a:bodyPr>
           <a:lstStyle/>
@@ -8797,6 +8669,7 @@
           <a:lstStyle/>
           <a:p>
             <a:pPr algn="ctr"/>
+            <a:endParaRPr/>
           </a:p>
         </p:txBody>
       </p:sp>
@@ -8817,7 +8690,7 @@
           <a:noFill/>
         </p:spPr>
         <p:txBody>
-          <a:bodyPr wrap="square" lIns="0" rIns="0" tIns="0" bIns="0">
+          <a:bodyPr wrap="square" lIns="0" tIns="0" rIns="0" bIns="0">
             <a:spAutoFit/>
           </a:bodyPr>
           <a:lstStyle/>
@@ -8882,6 +8755,7 @@
           <a:lstStyle/>
           <a:p>
             <a:pPr algn="ctr"/>
+            <a:endParaRPr/>
           </a:p>
         </p:txBody>
       </p:sp>
@@ -8902,7 +8776,7 @@
           <a:noFill/>
         </p:spPr>
         <p:txBody>
-          <a:bodyPr wrap="square" lIns="0" rIns="0" tIns="0" bIns="0">
+          <a:bodyPr wrap="square" lIns="0" tIns="0" rIns="0" bIns="0">
             <a:spAutoFit/>
           </a:bodyPr>
           <a:lstStyle/>
@@ -8941,7 +8815,7 @@
           <a:noFill/>
         </p:spPr>
         <p:txBody>
-          <a:bodyPr wrap="square" lIns="0" rIns="0" tIns="0" bIns="0">
+          <a:bodyPr wrap="square" lIns="0" tIns="0" rIns="0" bIns="0">
             <a:spAutoFit/>
           </a:bodyPr>
           <a:lstStyle/>
@@ -8988,7 +8862,7 @@
 </file>
 
 <file path=ppt/slides/slide7.xml><?xml version="1.0" encoding="utf-8"?>
-<p:sld xmlns:a="http://schemas.openxmlformats.org/drawingml/2006/main" xmlns:p="http://schemas.openxmlformats.org/presentationml/2006/main" xmlns:r="http://schemas.openxmlformats.org/officeDocument/2006/relationships">
+<p:sld xmlns:a="http://schemas.openxmlformats.org/drawingml/2006/main" xmlns:r="http://schemas.openxmlformats.org/officeDocument/2006/relationships" xmlns:p="http://schemas.openxmlformats.org/presentationml/2006/main">
   <p:cSld>
     <p:bg>
       <p:bgPr>
@@ -9004,7 +8878,14 @@
         <p:cNvGrpSpPr/>
         <p:nvPr/>
       </p:nvGrpSpPr>
-      <p:grpSpPr/>
+      <p:grpSpPr>
+        <a:xfrm>
+          <a:off x="0" y="0"/>
+          <a:ext cx="0" cy="0"/>
+          <a:chOff x="0" y="0"/>
+          <a:chExt cx="0" cy="0"/>
+        </a:xfrm>
+      </p:grpSpPr>
       <p:sp>
         <p:nvSpPr>
           <p:cNvPr id="2" name="TextBox 1"/>
@@ -9022,7 +8903,7 @@
           <a:noFill/>
         </p:spPr>
         <p:txBody>
-          <a:bodyPr wrap="square" lIns="0" rIns="0" tIns="0" bIns="0">
+          <a:bodyPr wrap="square" lIns="0" tIns="0" rIns="0" bIns="0">
             <a:spAutoFit/>
           </a:bodyPr>
           <a:lstStyle/>
@@ -9061,7 +8942,7 @@
           <a:noFill/>
         </p:spPr>
         <p:txBody>
-          <a:bodyPr wrap="square" lIns="0" rIns="0" tIns="0" bIns="0">
+          <a:bodyPr wrap="square" lIns="0" tIns="0" rIns="0" bIns="0">
             <a:spAutoFit/>
           </a:bodyPr>
           <a:lstStyle/>
@@ -9161,6 +9042,7 @@
           <a:lstStyle/>
           <a:p>
             <a:pPr algn="ctr"/>
+            <a:endParaRPr/>
           </a:p>
         </p:txBody>
       </p:sp>
@@ -9181,7 +9063,7 @@
           <a:noFill/>
         </p:spPr>
         <p:txBody>
-          <a:bodyPr wrap="square" lIns="0" rIns="0" tIns="0" bIns="0">
+          <a:bodyPr wrap="square" lIns="0" tIns="0" rIns="0" bIns="0">
             <a:spAutoFit/>
           </a:bodyPr>
           <a:lstStyle/>
@@ -9220,7 +9102,7 @@
           <a:noFill/>
         </p:spPr>
         <p:txBody>
-          <a:bodyPr wrap="square" lIns="0" rIns="0" tIns="0" bIns="0">
+          <a:bodyPr wrap="square" lIns="0" tIns="0" rIns="0" bIns="0">
             <a:spAutoFit/>
           </a:bodyPr>
           <a:lstStyle/>
@@ -9285,6 +9167,7 @@
           <a:lstStyle/>
           <a:p>
             <a:pPr algn="ctr"/>
+            <a:endParaRPr/>
           </a:p>
         </p:txBody>
       </p:sp>
@@ -9305,7 +9188,7 @@
           <a:noFill/>
         </p:spPr>
         <p:txBody>
-          <a:bodyPr wrap="square" lIns="0" rIns="0" tIns="0" bIns="0">
+          <a:bodyPr wrap="square" lIns="0" tIns="0" rIns="0" bIns="0">
             <a:spAutoFit/>
           </a:bodyPr>
           <a:lstStyle/>
@@ -9344,7 +9227,7 @@
           <a:noFill/>
         </p:spPr>
         <p:txBody>
-          <a:bodyPr wrap="square" lIns="0" rIns="0" tIns="0" bIns="0">
+          <a:bodyPr wrap="square" lIns="0" tIns="0" rIns="0" bIns="0">
             <a:spAutoFit/>
           </a:bodyPr>
           <a:lstStyle/>
@@ -9409,6 +9292,7 @@
           <a:lstStyle/>
           <a:p>
             <a:pPr algn="ctr"/>
+            <a:endParaRPr/>
           </a:p>
         </p:txBody>
       </p:sp>
@@ -9429,7 +9313,7 @@
           <a:noFill/>
         </p:spPr>
         <p:txBody>
-          <a:bodyPr wrap="square" lIns="0" rIns="0" tIns="0" bIns="0">
+          <a:bodyPr wrap="square" lIns="0" tIns="0" rIns="0" bIns="0">
             <a:spAutoFit/>
           </a:bodyPr>
           <a:lstStyle/>
@@ -9468,7 +9352,7 @@
           <a:noFill/>
         </p:spPr>
         <p:txBody>
-          <a:bodyPr wrap="square" lIns="0" rIns="0" tIns="0" bIns="0">
+          <a:bodyPr wrap="square" lIns="0" tIns="0" rIns="0" bIns="0">
             <a:spAutoFit/>
           </a:bodyPr>
           <a:lstStyle/>
@@ -9533,6 +9417,7 @@
           <a:lstStyle/>
           <a:p>
             <a:pPr algn="ctr"/>
+            <a:endParaRPr/>
           </a:p>
         </p:txBody>
       </p:sp>
@@ -9553,7 +9438,7 @@
           <a:noFill/>
         </p:spPr>
         <p:txBody>
-          <a:bodyPr wrap="square" lIns="0" rIns="0" tIns="0" bIns="0">
+          <a:bodyPr wrap="square" lIns="0" tIns="0" rIns="0" bIns="0">
             <a:spAutoFit/>
           </a:bodyPr>
           <a:lstStyle/>
@@ -9592,7 +9477,7 @@
           <a:noFill/>
         </p:spPr>
         <p:txBody>
-          <a:bodyPr wrap="square" lIns="0" rIns="0" tIns="0" bIns="0">
+          <a:bodyPr wrap="square" lIns="0" tIns="0" rIns="0" bIns="0">
             <a:spAutoFit/>
           </a:bodyPr>
           <a:lstStyle/>
@@ -9623,7 +9508,7 @@
 </file>
 
 <file path=ppt/slides/slide8.xml><?xml version="1.0" encoding="utf-8"?>
-<p:sld xmlns:a="http://schemas.openxmlformats.org/drawingml/2006/main" xmlns:p="http://schemas.openxmlformats.org/presentationml/2006/main" xmlns:r="http://schemas.openxmlformats.org/officeDocument/2006/relationships">
+<p:sld xmlns:a="http://schemas.openxmlformats.org/drawingml/2006/main" xmlns:r="http://schemas.openxmlformats.org/officeDocument/2006/relationships" xmlns:p="http://schemas.openxmlformats.org/presentationml/2006/main">
   <p:cSld>
     <p:bg>
       <p:bgPr>
@@ -9639,7 +9524,14 @@
         <p:cNvGrpSpPr/>
         <p:nvPr/>
       </p:nvGrpSpPr>
-      <p:grpSpPr/>
+      <p:grpSpPr>
+        <a:xfrm>
+          <a:off x="0" y="0"/>
+          <a:ext cx="0" cy="0"/>
+          <a:chOff x="0" y="0"/>
+          <a:chExt cx="0" cy="0"/>
+        </a:xfrm>
+      </p:grpSpPr>
       <p:sp>
         <p:nvSpPr>
           <p:cNvPr id="2" name="TextBox 1"/>
@@ -9657,7 +9549,7 @@
           <a:noFill/>
         </p:spPr>
         <p:txBody>
-          <a:bodyPr wrap="square" lIns="0" rIns="0" tIns="0" bIns="0">
+          <a:bodyPr wrap="square" lIns="0" tIns="0" rIns="0" bIns="0">
             <a:spAutoFit/>
           </a:bodyPr>
           <a:lstStyle/>
@@ -9696,7 +9588,7 @@
           <a:noFill/>
         </p:spPr>
         <p:txBody>
-          <a:bodyPr wrap="square" lIns="0" rIns="0" tIns="0" bIns="0">
+          <a:bodyPr wrap="square" lIns="0" tIns="0" rIns="0" bIns="0">
             <a:spAutoFit/>
           </a:bodyPr>
           <a:lstStyle/>
@@ -9792,7 +9684,7 @@
 </file>
 
 <file path=ppt/slides/slide9.xml><?xml version="1.0" encoding="utf-8"?>
-<p:sld xmlns:a="http://schemas.openxmlformats.org/drawingml/2006/main" xmlns:p="http://schemas.openxmlformats.org/presentationml/2006/main" xmlns:r="http://schemas.openxmlformats.org/officeDocument/2006/relationships">
+<p:sld xmlns:a="http://schemas.openxmlformats.org/drawingml/2006/main" xmlns:r="http://schemas.openxmlformats.org/officeDocument/2006/relationships" xmlns:p="http://schemas.openxmlformats.org/presentationml/2006/main">
   <p:cSld>
     <p:bg>
       <p:bgPr>
@@ -9808,7 +9700,14 @@
         <p:cNvGrpSpPr/>
         <p:nvPr/>
       </p:nvGrpSpPr>
-      <p:grpSpPr/>
+      <p:grpSpPr>
+        <a:xfrm>
+          <a:off x="0" y="0"/>
+          <a:ext cx="0" cy="0"/>
+          <a:chOff x="0" y="0"/>
+          <a:chExt cx="0" cy="0"/>
+        </a:xfrm>
+      </p:grpSpPr>
       <p:sp>
         <p:nvSpPr>
           <p:cNvPr id="2" name="TextBox 1"/>
@@ -9826,7 +9725,7 @@
           <a:noFill/>
         </p:spPr>
         <p:txBody>
-          <a:bodyPr wrap="square" lIns="0" rIns="0" tIns="0" bIns="0">
+          <a:bodyPr wrap="square" lIns="0" tIns="0" rIns="0" bIns="0">
             <a:spAutoFit/>
           </a:bodyPr>
           <a:lstStyle/>
@@ -9865,7 +9764,7 @@
           <a:noFill/>
         </p:spPr>
         <p:txBody>
-          <a:bodyPr wrap="square" lIns="0" rIns="0" tIns="0" bIns="0">
+          <a:bodyPr wrap="square" lIns="0" tIns="0" rIns="0" bIns="0">
             <a:spAutoFit/>
           </a:bodyPr>
           <a:lstStyle/>
@@ -9969,7 +9868,7 @@
           <a:noFill/>
         </p:spPr>
         <p:txBody>
-          <a:bodyPr wrap="square" lIns="0" rIns="0" tIns="0" bIns="0">
+          <a:bodyPr wrap="square" lIns="0" tIns="0" rIns="0" bIns="0">
             <a:spAutoFit/>
           </a:bodyPr>
           <a:lstStyle/>
@@ -10008,7 +9907,7 @@
           <a:noFill/>
         </p:spPr>
         <p:txBody>
-          <a:bodyPr wrap="square" lIns="0" rIns="0" tIns="0" bIns="0">
+          <a:bodyPr wrap="square" lIns="0" tIns="0" rIns="0" bIns="0">
             <a:spAutoFit/>
           </a:bodyPr>
           <a:lstStyle/>
@@ -10047,7 +9946,7 @@
           <a:noFill/>
         </p:spPr>
         <p:txBody>
-          <a:bodyPr wrap="square" lIns="0" rIns="0" tIns="0" bIns="0">
+          <a:bodyPr wrap="square" lIns="0" tIns="0" rIns="0" bIns="0">
             <a:spAutoFit/>
           </a:bodyPr>
           <a:lstStyle/>
@@ -10086,7 +9985,7 @@
           <a:noFill/>
         </p:spPr>
         <p:txBody>
-          <a:bodyPr wrap="square" lIns="0" rIns="0" tIns="0" bIns="0">
+          <a:bodyPr wrap="square" lIns="0" tIns="0" rIns="0" bIns="0">
             <a:spAutoFit/>
           </a:bodyPr>
           <a:lstStyle/>
@@ -10125,7 +10024,7 @@
           <a:noFill/>
         </p:spPr>
         <p:txBody>
-          <a:bodyPr wrap="square" lIns="0" rIns="0" tIns="0" bIns="0">
+          <a:bodyPr wrap="square" lIns="0" tIns="0" rIns="0" bIns="0">
             <a:spAutoFit/>
           </a:bodyPr>
           <a:lstStyle/>
@@ -10164,7 +10063,7 @@
           <a:noFill/>
         </p:spPr>
         <p:txBody>
-          <a:bodyPr wrap="square" lIns="0" rIns="0" tIns="0" bIns="0">
+          <a:bodyPr wrap="square" lIns="0" tIns="0" rIns="0" bIns="0">
             <a:spAutoFit/>
           </a:bodyPr>
           <a:lstStyle/>
@@ -10203,7 +10102,7 @@
           <a:noFill/>
         </p:spPr>
         <p:txBody>
-          <a:bodyPr wrap="square" lIns="0" rIns="0" tIns="0" bIns="0">
+          <a:bodyPr wrap="square" lIns="0" tIns="0" rIns="0" bIns="0">
             <a:spAutoFit/>
           </a:bodyPr>
           <a:lstStyle/>
@@ -10242,7 +10141,7 @@
           <a:noFill/>
         </p:spPr>
         <p:txBody>
-          <a:bodyPr wrap="square" lIns="0" rIns="0" tIns="0" bIns="0">
+          <a:bodyPr wrap="square" lIns="0" tIns="0" rIns="0" bIns="0">
             <a:spAutoFit/>
           </a:bodyPr>
           <a:lstStyle/>
@@ -10603,44 +10502,44 @@
         <a:sysClr val="window" lastClr="FFFFFF"/>
       </a:lt1>
       <a:dk2>
-        <a:srgbClr val="1F497D"/>
+        <a:srgbClr val="0E2841"/>
       </a:dk2>
       <a:lt2>
-        <a:srgbClr val="EEECE1"/>
+        <a:srgbClr val="E8E8E8"/>
       </a:lt2>
       <a:accent1>
-        <a:srgbClr val="4F81BD"/>
+        <a:srgbClr val="156082"/>
       </a:accent1>
       <a:accent2>
-        <a:srgbClr val="C0504D"/>
+        <a:srgbClr val="E97132"/>
       </a:accent2>
       <a:accent3>
-        <a:srgbClr val="9BBB59"/>
+        <a:srgbClr val="196B24"/>
       </a:accent3>
       <a:accent4>
-        <a:srgbClr val="8064A2"/>
+        <a:srgbClr val="0F9ED5"/>
       </a:accent4>
       <a:accent5>
-        <a:srgbClr val="4BACC6"/>
+        <a:srgbClr val="A02B93"/>
       </a:accent5>
       <a:accent6>
-        <a:srgbClr val="F79646"/>
+        <a:srgbClr val="4EA72E"/>
       </a:accent6>
       <a:hlink>
-        <a:srgbClr val="0000FF"/>
+        <a:srgbClr val="467886"/>
       </a:hlink>
       <a:folHlink>
-        <a:srgbClr val="800080"/>
+        <a:srgbClr val="96607D"/>
       </a:folHlink>
     </a:clrScheme>
     <a:fontScheme name="Office">
       <a:majorFont>
-        <a:latin typeface="Calibri"/>
+        <a:latin typeface="Aptos Display" panose="02110004020202020204"/>
         <a:ea typeface=""/>
         <a:cs typeface=""/>
-        <a:font script="Jpan" typeface="ＭＳ Ｐゴシック"/>
+        <a:font script="Jpan" typeface="游ゴシック Light"/>
         <a:font script="Hang" typeface="맑은 고딕"/>
-        <a:font script="Hans" typeface="宋体"/>
+        <a:font script="Hans" typeface="等线 Light"/>
         <a:font script="Hant" typeface="新細明體"/>
         <a:font script="Arab" typeface="Times New Roman"/>
         <a:font script="Hebr" typeface="Times New Roman"/>
@@ -10668,14 +10567,31 @@
         <a:font script="Viet" typeface="Times New Roman"/>
         <a:font script="Uigh" typeface="Microsoft Uighur"/>
         <a:font script="Geor" typeface="Sylfaen"/>
+        <a:font script="Armn" typeface="Arial"/>
+        <a:font script="Bugi" typeface="Leelawadee UI"/>
+        <a:font script="Bopo" typeface="Microsoft JhengHei"/>
+        <a:font script="Java" typeface="Javanese Text"/>
+        <a:font script="Lisu" typeface="Segoe UI"/>
+        <a:font script="Mymr" typeface="Myanmar Text"/>
+        <a:font script="Nkoo" typeface="Ebrima"/>
+        <a:font script="Olck" typeface="Nirmala UI"/>
+        <a:font script="Osma" typeface="Ebrima"/>
+        <a:font script="Phag" typeface="Phagspa"/>
+        <a:font script="Syrn" typeface="Estrangelo Edessa"/>
+        <a:font script="Syrj" typeface="Estrangelo Edessa"/>
+        <a:font script="Syre" typeface="Estrangelo Edessa"/>
+        <a:font script="Sora" typeface="Nirmala UI"/>
+        <a:font script="Tale" typeface="Microsoft Tai Le"/>
+        <a:font script="Talu" typeface="Microsoft New Tai Lue"/>
+        <a:font script="Tfng" typeface="Ebrima"/>
       </a:majorFont>
       <a:minorFont>
-        <a:latin typeface="Calibri"/>
+        <a:latin typeface="Aptos" panose="02110004020202020204"/>
         <a:ea typeface=""/>
         <a:cs typeface=""/>
-        <a:font script="Jpan" typeface="ＭＳ Ｐゴシック"/>
+        <a:font script="Jpan" typeface="游ゴシック"/>
         <a:font script="Hang" typeface="맑은 고딕"/>
-        <a:font script="Hans" typeface="宋体"/>
+        <a:font script="Hans" typeface="等线"/>
         <a:font script="Hant" typeface="新細明體"/>
         <a:font script="Arab" typeface="Arial"/>
         <a:font script="Hebr" typeface="Arial"/>
@@ -10703,6 +10619,23 @@
         <a:font script="Viet" typeface="Arial"/>
         <a:font script="Uigh" typeface="Microsoft Uighur"/>
         <a:font script="Geor" typeface="Sylfaen"/>
+        <a:font script="Armn" typeface="Arial"/>
+        <a:font script="Bugi" typeface="Leelawadee UI"/>
+        <a:font script="Bopo" typeface="Microsoft JhengHei"/>
+        <a:font script="Java" typeface="Javanese Text"/>
+        <a:font script="Lisu" typeface="Segoe UI"/>
+        <a:font script="Mymr" typeface="Myanmar Text"/>
+        <a:font script="Nkoo" typeface="Ebrima"/>
+        <a:font script="Olck" typeface="Nirmala UI"/>
+        <a:font script="Osma" typeface="Ebrima"/>
+        <a:font script="Phag" typeface="Phagspa"/>
+        <a:font script="Syrn" typeface="Estrangelo Edessa"/>
+        <a:font script="Syrj" typeface="Estrangelo Edessa"/>
+        <a:font script="Syre" typeface="Estrangelo Edessa"/>
+        <a:font script="Sora" typeface="Nirmala UI"/>
+        <a:font script="Tale" typeface="Microsoft Tai Le"/>
+        <a:font script="Talu" typeface="Microsoft New Tai Lue"/>
+        <a:font script="Tfng" typeface="Ebrima"/>
       </a:minorFont>
     </a:fontScheme>
     <a:fmtScheme name="Office">
@@ -10714,180 +10647,136 @@
           <a:gsLst>
             <a:gs pos="0">
               <a:schemeClr val="phClr">
-                <a:tint val="50000"/>
-                <a:satMod val="300000"/>
+                <a:lumMod val="110000"/>
+                <a:satMod val="105000"/>
+                <a:tint val="67000"/>
               </a:schemeClr>
             </a:gs>
-            <a:gs pos="35000">
+            <a:gs pos="50000">
               <a:schemeClr val="phClr">
-                <a:tint val="37000"/>
-                <a:satMod val="300000"/>
+                <a:lumMod val="105000"/>
+                <a:satMod val="103000"/>
+                <a:tint val="73000"/>
               </a:schemeClr>
             </a:gs>
             <a:gs pos="100000">
               <a:schemeClr val="phClr">
-                <a:tint val="15000"/>
-                <a:satMod val="350000"/>
+                <a:lumMod val="105000"/>
+                <a:satMod val="109000"/>
+                <a:tint val="81000"/>
               </a:schemeClr>
             </a:gs>
           </a:gsLst>
-          <a:lin ang="16200000" scaled="1"/>
+          <a:lin ang="5400000" scaled="0"/>
         </a:gradFill>
         <a:gradFill rotWithShape="1">
           <a:gsLst>
             <a:gs pos="0">
               <a:schemeClr val="phClr">
-                <a:tint val="100000"/>
+                <a:satMod val="103000"/>
+                <a:lumMod val="102000"/>
+                <a:tint val="94000"/>
+              </a:schemeClr>
+            </a:gs>
+            <a:gs pos="50000">
+              <a:schemeClr val="phClr">
+                <a:satMod val="110000"/>
+                <a:lumMod val="100000"/>
                 <a:shade val="100000"/>
-                <a:satMod val="130000"/>
               </a:schemeClr>
             </a:gs>
             <a:gs pos="100000">
               <a:schemeClr val="phClr">
-                <a:tint val="50000"/>
-                <a:shade val="100000"/>
-                <a:satMod val="350000"/>
+                <a:lumMod val="99000"/>
+                <a:satMod val="120000"/>
+                <a:shade val="78000"/>
               </a:schemeClr>
             </a:gs>
           </a:gsLst>
-          <a:lin ang="16200000" scaled="0"/>
+          <a:lin ang="5400000" scaled="0"/>
         </a:gradFill>
       </a:fillStyleLst>
       <a:lnStyleLst>
-        <a:ln w="9525" cap="flat" cmpd="sng" algn="ctr">
+        <a:ln w="12700" cap="flat" cmpd="sng" algn="ctr">
           <a:solidFill>
-            <a:schemeClr val="phClr">
-              <a:shade val="95000"/>
-              <a:satMod val="105000"/>
-            </a:schemeClr>
+            <a:schemeClr val="phClr"/>
           </a:solidFill>
           <a:prstDash val="solid"/>
+          <a:miter lim="800000"/>
+        </a:ln>
+        <a:ln w="19050" cap="flat" cmpd="sng" algn="ctr">
+          <a:solidFill>
+            <a:schemeClr val="phClr"/>
+          </a:solidFill>
+          <a:prstDash val="solid"/>
+          <a:miter lim="800000"/>
         </a:ln>
         <a:ln w="25400" cap="flat" cmpd="sng" algn="ctr">
           <a:solidFill>
             <a:schemeClr val="phClr"/>
           </a:solidFill>
           <a:prstDash val="solid"/>
-        </a:ln>
-        <a:ln w="38100" cap="flat" cmpd="sng" algn="ctr">
-          <a:solidFill>
-            <a:schemeClr val="phClr"/>
-          </a:solidFill>
-          <a:prstDash val="solid"/>
+          <a:miter lim="800000"/>
         </a:ln>
       </a:lnStyleLst>
       <a:effectStyleLst>
         <a:effectStyle>
+          <a:effectLst/>
+        </a:effectStyle>
+        <a:effectStyle>
+          <a:effectLst/>
+        </a:effectStyle>
+        <a:effectStyle>
           <a:effectLst>
-            <a:outerShdw blurRad="40000" dist="20000" dir="5400000" rotWithShape="0">
+            <a:outerShdw blurRad="57150" dist="19050" dir="5400000" algn="ctr" rotWithShape="0">
               <a:srgbClr val="000000">
-                <a:alpha val="38000"/>
+                <a:alpha val="63000"/>
               </a:srgbClr>
             </a:outerShdw>
           </a:effectLst>
-        </a:effectStyle>
-        <a:effectStyle>
-          <a:effectLst>
-            <a:outerShdw blurRad="40000" dist="23000" dir="5400000" rotWithShape="0">
-              <a:srgbClr val="000000">
-                <a:alpha val="35000"/>
-              </a:srgbClr>
-            </a:outerShdw>
-          </a:effectLst>
-        </a:effectStyle>
-        <a:effectStyle>
-          <a:effectLst>
-            <a:outerShdw blurRad="40000" dist="23000" dir="5400000" rotWithShape="0">
-              <a:srgbClr val="000000">
-                <a:alpha val="35000"/>
-              </a:srgbClr>
-            </a:outerShdw>
-          </a:effectLst>
-          <a:scene3d>
-            <a:camera prst="orthographicFront">
-              <a:rot lat="0" lon="0" rev="0"/>
-            </a:camera>
-            <a:lightRig rig="threePt" dir="t">
-              <a:rot lat="0" lon="0" rev="1200000"/>
-            </a:lightRig>
-          </a:scene3d>
-          <a:sp3d>
-            <a:bevelT w="63500" h="25400"/>
-          </a:sp3d>
         </a:effectStyle>
       </a:effectStyleLst>
       <a:bgFillStyleLst>
         <a:solidFill>
           <a:schemeClr val="phClr"/>
         </a:solidFill>
+        <a:solidFill>
+          <a:schemeClr val="phClr">
+            <a:tint val="95000"/>
+            <a:satMod val="170000"/>
+          </a:schemeClr>
+        </a:solidFill>
         <a:gradFill rotWithShape="1">
           <a:gsLst>
             <a:gs pos="0">
               <a:schemeClr val="phClr">
-                <a:tint val="40000"/>
-                <a:satMod val="350000"/>
+                <a:tint val="93000"/>
+                <a:satMod val="150000"/>
+                <a:shade val="98000"/>
+                <a:lumMod val="102000"/>
               </a:schemeClr>
             </a:gs>
-            <a:gs pos="40000">
+            <a:gs pos="50000">
               <a:schemeClr val="phClr">
-                <a:tint val="45000"/>
-                <a:shade val="99000"/>
-                <a:satMod val="350000"/>
+                <a:tint val="98000"/>
+                <a:satMod val="130000"/>
+                <a:shade val="90000"/>
+                <a:lumMod val="103000"/>
               </a:schemeClr>
             </a:gs>
             <a:gs pos="100000">
               <a:schemeClr val="phClr">
-                <a:shade val="20000"/>
-                <a:satMod val="255000"/>
+                <a:shade val="63000"/>
+                <a:satMod val="120000"/>
               </a:schemeClr>
             </a:gs>
           </a:gsLst>
-          <a:path path="circle">
-            <a:fillToRect l="50000" t="-80000" r="50000" b="180000"/>
-          </a:path>
-        </a:gradFill>
-        <a:gradFill rotWithShape="1">
-          <a:gsLst>
-            <a:gs pos="0">
-              <a:schemeClr val="phClr">
-                <a:tint val="80000"/>
-                <a:satMod val="300000"/>
-              </a:schemeClr>
-            </a:gs>
-            <a:gs pos="100000">
-              <a:schemeClr val="phClr">
-                <a:shade val="30000"/>
-                <a:satMod val="200000"/>
-              </a:schemeClr>
-            </a:gs>
-          </a:gsLst>
-          <a:path path="circle">
-            <a:fillToRect l="50000" t="50000" r="50000" b="50000"/>
-          </a:path>
+          <a:lin ang="5400000" scaled="0"/>
         </a:gradFill>
       </a:bgFillStyleLst>
     </a:fmtScheme>
   </a:themeElements>
   <a:objectDefaults>
-    <a:spDef>
-      <a:spPr/>
-      <a:bodyPr/>
-      <a:lstStyle/>
-      <a:style>
-        <a:lnRef idx="1">
-          <a:schemeClr val="accent1"/>
-        </a:lnRef>
-        <a:fillRef idx="3">
-          <a:schemeClr val="accent1"/>
-        </a:fillRef>
-        <a:effectRef idx="2">
-          <a:schemeClr val="accent1"/>
-        </a:effectRef>
-        <a:fontRef idx="minor">
-          <a:schemeClr val="lt1"/>
-        </a:fontRef>
-      </a:style>
-    </a:spDef>
     <a:lnDef>
       <a:spPr/>
       <a:bodyPr/>
@@ -10909,5 +10798,10 @@
     </a:lnDef>
   </a:objectDefaults>
   <a:extraClrSchemeLst/>
+  <a:extLst>
+    <a:ext uri="{05A4C25C-085E-4340-85A3-A5531E510DB2}">
+      <thm15:themeFamily xmlns:thm15="http://schemas.microsoft.com/office/thememl/2012/main" name="Office Theme" id="{2E142A2C-CD16-42D6-873A-C26D2A0506FA}" vid="{1BDDFF52-6CD6-40A5-AB3C-68EB2F1E4D0A}"/>
+    </a:ext>
+  </a:extLst>
 </a:theme>
 </file>